--- a/decks/output/staff-attendance-v0.pptx
+++ b/decks/output/staff-attendance-v0.pptx
@@ -3095,14 +3095,6 @@
 <file path=ppt/slides/slide1.xml><?xml version="1.0" encoding="utf-8"?>
 <p:sld xmlns:a="http://schemas.openxmlformats.org/drawingml/2006/main" xmlns:p="http://schemas.openxmlformats.org/presentationml/2006/main" xmlns:r="http://schemas.openxmlformats.org/officeDocument/2006/relationships">
   <p:cSld>
-    <p:bg>
-      <p:bgPr>
-        <a:solidFill>
-          <a:srgbClr val="F6F1E7"/>
-        </a:solidFill>
-        <a:effectLst/>
-      </p:bgPr>
-    </p:bg>
     <p:spTree>
       <p:nvGrpSpPr>
         <p:cNvPr id="1" name=""/>
@@ -3112,1011 +3104,7 @@
       <p:grpSpPr/>
       <p:pic>
         <p:nvPicPr>
-          <p:cNvPr id="2" name="Picture 1" descr="kente-strip-staff.png"/>
-          <p:cNvPicPr>
-            <a:picLocks noChangeAspect="1"/>
-          </p:cNvPicPr>
-          <p:nvPr/>
-        </p:nvPicPr>
-        <p:blipFill>
-          <a:blip r:embed="rId2"/>
-          <a:stretch>
-            <a:fillRect/>
-          </a:stretch>
-        </p:blipFill>
-        <p:spPr>
-          <a:xfrm>
-            <a:off x="0" y="0"/>
-            <a:ext cx="12192000" cy="100000"/>
-          </a:xfrm>
-          <a:prstGeom prst="rect">
-            <a:avLst/>
-          </a:prstGeom>
-        </p:spPr>
-      </p:pic>
-      <p:sp>
-        <p:nvSpPr>
-          <p:cNvPr id="3" name="TextBox 2"/>
-          <p:cNvSpPr txBox="1"/>
-          <p:nvPr/>
-        </p:nvSpPr>
-        <p:spPr>
-          <a:xfrm>
-            <a:off x="800000" y="600000"/>
-            <a:ext cx="1500000" cy="300000"/>
-          </a:xfrm>
-          <a:prstGeom prst="rect">
-            <a:avLst/>
-          </a:prstGeom>
-          <a:noFill/>
-        </p:spPr>
-        <p:txBody>
-          <a:bodyPr wrap="square">
-            <a:spAutoFit/>
-          </a:bodyPr>
-          <a:lstStyle/>
-          <a:p>
-            <a:pPr algn="l"/>
-            <a:r>
-              <a:rPr sz="1100" b="1">
-                <a:solidFill>
-                  <a:srgbClr val="8B6B22"/>
-                </a:solidFill>
-                <a:latin typeface="DM Sans"/>
-              </a:rPr>
-              <a:t>STAFF</a:t>
-            </a:r>
-          </a:p>
-        </p:txBody>
-      </p:sp>
-      <p:sp>
-        <p:nvSpPr>
-          <p:cNvPr id="4" name="TextBox 3"/>
-          <p:cNvSpPr txBox="1"/>
-          <p:nvPr/>
-        </p:nvSpPr>
-        <p:spPr>
-          <a:xfrm>
-            <a:off x="800000" y="2200000"/>
-            <a:ext cx="10500000" cy="1500000"/>
-          </a:xfrm>
-          <a:prstGeom prst="rect">
-            <a:avLst/>
-          </a:prstGeom>
-          <a:noFill/>
-        </p:spPr>
-        <p:txBody>
-          <a:bodyPr wrap="square">
-            <a:spAutoFit/>
-          </a:bodyPr>
-          <a:lstStyle/>
-          <a:p>
-            <a:pPr algn="ctr"/>
-            <a:r>
-              <a:rPr sz="6000" b="1">
-                <a:solidFill>
-                  <a:srgbClr val="0E1411"/>
-                </a:solidFill>
-                <a:latin typeface="Playfair Display"/>
-              </a:rPr>
-              <a:t>Staff Attendance</a:t>
-            </a:r>
-          </a:p>
-        </p:txBody>
-      </p:sp>
-      <p:pic>
-        <p:nvPicPr>
-          <p:cNvPr id="5" name="Picture 4" descr="gold-deco-hairline.png"/>
-          <p:cNvPicPr>
-            <a:picLocks noChangeAspect="1"/>
-          </p:cNvPicPr>
-          <p:nvPr/>
-        </p:nvPicPr>
-        <p:blipFill>
-          <a:blip r:embed="rId3"/>
-          <a:stretch>
-            <a:fillRect/>
-          </a:stretch>
-        </p:blipFill>
-        <p:spPr>
-          <a:xfrm>
-            <a:off x="5896000" y="3900000"/>
-            <a:ext cx="400000" cy="20000"/>
-          </a:xfrm>
-          <a:prstGeom prst="rect">
-            <a:avLst/>
-          </a:prstGeom>
-        </p:spPr>
-      </p:pic>
-      <p:sp>
-        <p:nvSpPr>
-          <p:cNvPr id="6" name="TextBox 5"/>
-          <p:cNvSpPr txBox="1"/>
-          <p:nvPr/>
-        </p:nvSpPr>
-        <p:spPr>
-          <a:xfrm>
-            <a:off x="800000" y="4100000"/>
-            <a:ext cx="10500000" cy="500000"/>
-          </a:xfrm>
-          <a:prstGeom prst="rect">
-            <a:avLst/>
-          </a:prstGeom>
-          <a:noFill/>
-        </p:spPr>
-        <p:txBody>
-          <a:bodyPr wrap="square">
-            <a:spAutoFit/>
-          </a:bodyPr>
-          <a:lstStyle/>
-          <a:p>
-            <a:pPr algn="ctr"/>
-            <a:r>
-              <a:rPr sz="1800" b="0">
-                <a:solidFill>
-                  <a:srgbClr val="1A1714"/>
-                </a:solidFill>
-                <a:latin typeface="DM Sans"/>
-              </a:rPr>
-              <a:t>Clocking in, honestly</a:t>
-            </a:r>
-          </a:p>
-        </p:txBody>
-      </p:sp>
-      <p:sp>
-        <p:nvSpPr>
-          <p:cNvPr id="7" name="TextBox 6"/>
-          <p:cNvSpPr txBox="1"/>
-          <p:nvPr/>
-        </p:nvSpPr>
-        <p:spPr>
-          <a:xfrm>
-            <a:off x="800000" y="6200000"/>
-            <a:ext cx="4000000" cy="300000"/>
-          </a:xfrm>
-          <a:prstGeom prst="rect">
-            <a:avLst/>
-          </a:prstGeom>
-          <a:noFill/>
-        </p:spPr>
-        <p:txBody>
-          <a:bodyPr wrap="square">
-            <a:spAutoFit/>
-          </a:bodyPr>
-          <a:lstStyle/>
-          <a:p>
-            <a:pPr algn="l"/>
-            <a:r>
-              <a:rPr sz="1100" b="0">
-                <a:solidFill>
-                  <a:srgbClr val="8B6B22"/>
-                </a:solidFill>
-                <a:latin typeface="DM Sans"/>
-              </a:rPr>
-              <a:t>For: Executive Leadership</a:t>
-            </a:r>
-          </a:p>
-        </p:txBody>
-      </p:sp>
-      <p:sp>
-        <p:nvSpPr>
-          <p:cNvPr id="8" name="TextBox 7"/>
-          <p:cNvSpPr txBox="1"/>
-          <p:nvPr/>
-        </p:nvSpPr>
-        <p:spPr>
-          <a:xfrm>
-            <a:off x="8000000" y="6200000"/>
-            <a:ext cx="4000000" cy="300000"/>
-          </a:xfrm>
-          <a:prstGeom prst="rect">
-            <a:avLst/>
-          </a:prstGeom>
-          <a:noFill/>
-        </p:spPr>
-        <p:txBody>
-          <a:bodyPr wrap="square">
-            <a:spAutoFit/>
-          </a:bodyPr>
-          <a:lstStyle/>
-          <a:p>
-            <a:pPr algn="r"/>
-            <a:r>
-              <a:rPr sz="1100" b="0">
-                <a:solidFill>
-                  <a:srgbClr val="D8CFBE"/>
-                </a:solidFill>
-                <a:latin typeface="DM Sans"/>
-              </a:rPr>
-              <a:t>v0 · 2026-05-28</a:t>
-            </a:r>
-          </a:p>
-        </p:txBody>
-      </p:sp>
-    </p:spTree>
-  </p:cSld>
-  <p:clrMapOvr>
-    <a:masterClrMapping/>
-  </p:clrMapOvr>
-</p:sld>
-</file>
-
-<file path=ppt/slides/slide10.xml><?xml version="1.0" encoding="utf-8"?>
-<p:sld xmlns:a="http://schemas.openxmlformats.org/drawingml/2006/main" xmlns:p="http://schemas.openxmlformats.org/presentationml/2006/main" xmlns:r="http://schemas.openxmlformats.org/officeDocument/2006/relationships">
-  <p:cSld>
-    <p:bg>
-      <p:bgPr>
-        <a:solidFill>
-          <a:srgbClr val="F6F1E7"/>
-        </a:solidFill>
-        <a:effectLst/>
-      </p:bgPr>
-    </p:bg>
-    <p:spTree>
-      <p:nvGrpSpPr>
-        <p:cNvPr id="1" name=""/>
-        <p:cNvGrpSpPr/>
-        <p:nvPr/>
-      </p:nvGrpSpPr>
-      <p:grpSpPr/>
-      <p:sp>
-        <p:nvSpPr>
-          <p:cNvPr id="2" name="TextBox 1"/>
-          <p:cNvSpPr txBox="1"/>
-          <p:nvPr/>
-        </p:nvSpPr>
-        <p:spPr>
-          <a:xfrm>
-            <a:off x="800000" y="500000"/>
-            <a:ext cx="10500000" cy="700000"/>
-          </a:xfrm>
-          <a:prstGeom prst="rect">
-            <a:avLst/>
-          </a:prstGeom>
-          <a:noFill/>
-        </p:spPr>
-        <p:txBody>
-          <a:bodyPr wrap="square">
-            <a:spAutoFit/>
-          </a:bodyPr>
-          <a:lstStyle/>
-          <a:p>
-            <a:pPr algn="l"/>
-            <a:r>
-              <a:rPr sz="3200" b="1">
-                <a:solidFill>
-                  <a:srgbClr val="0E1411"/>
-                </a:solidFill>
-                <a:latin typeface="DM Sans"/>
-              </a:rPr>
-              <a:t>Streak banner</a:t>
-            </a:r>
-          </a:p>
-        </p:txBody>
-      </p:sp>
-      <p:sp>
-        <p:nvSpPr>
-          <p:cNvPr id="3" name="Rectangle 2"/>
-          <p:cNvSpPr/>
-          <p:nvPr/>
-        </p:nvSpPr>
-        <p:spPr>
-          <a:xfrm>
-            <a:off x="800000" y="1500000"/>
-            <a:ext cx="5800000" cy="4500000"/>
-          </a:xfrm>
-          <a:prstGeom prst="rect">
-            <a:avLst/>
-          </a:prstGeom>
-          <a:solidFill>
-            <a:srgbClr val="FBF7EF"/>
-          </a:solidFill>
-          <a:ln>
-            <a:solidFill>
-              <a:srgbClr val="D8CFBE"/>
-            </a:solidFill>
-          </a:ln>
-        </p:spPr>
-        <p:style>
-          <a:lnRef idx="1">
-            <a:schemeClr val="accent1"/>
-          </a:lnRef>
-          <a:fillRef idx="3">
-            <a:schemeClr val="accent1"/>
-          </a:fillRef>
-          <a:effectRef idx="2">
-            <a:schemeClr val="accent1"/>
-          </a:effectRef>
-          <a:fontRef idx="minor">
-            <a:schemeClr val="lt1"/>
-          </a:fontRef>
-        </p:style>
-        <p:txBody>
-          <a:bodyPr rtlCol="0" anchor="ctr"/>
-          <a:lstStyle/>
-          <a:p>
-            <a:pPr algn="ctr"/>
-            <a:r>
-              <a:rPr sz="1100">
-                <a:solidFill>
-                  <a:srgbClr val="8B6B22"/>
-                </a:solidFill>
-                <a:latin typeface="DM Sans"/>
-              </a:rPr>
-              <a:t>[REPLACE: S12-streak-banner.png]</a:t>
-            </a:r>
-          </a:p>
-        </p:txBody>
-      </p:sp>
-      <p:sp>
-        <p:nvSpPr>
-          <p:cNvPr id="4" name="TextBox 3"/>
-          <p:cNvSpPr txBox="1"/>
-          <p:nvPr/>
-        </p:nvSpPr>
-        <p:spPr>
-          <a:xfrm>
-            <a:off x="7100000" y="1500000"/>
-            <a:ext cx="4200000" cy="1100000"/>
-          </a:xfrm>
-          <a:prstGeom prst="rect">
-            <a:avLst/>
-          </a:prstGeom>
-          <a:noFill/>
-        </p:spPr>
-        <p:txBody>
-          <a:bodyPr wrap="square">
-            <a:spAutoFit/>
-          </a:bodyPr>
-          <a:lstStyle/>
-          <a:p>
-            <a:pPr algn="l"/>
-            <a:r>
-              <a:rPr sz="1600" b="0">
-                <a:solidFill>
-                  <a:srgbClr val="1A1714"/>
-                </a:solidFill>
-                <a:latin typeface="DM Sans"/>
-              </a:rPr>
-              <a:t>①  Yesterday counts. Today builds. Tomorrow continues.</a:t>
-            </a:r>
-          </a:p>
-        </p:txBody>
-      </p:sp>
-      <p:sp>
-        <p:nvSpPr>
-          <p:cNvPr id="5" name="TextBox 4"/>
-          <p:cNvSpPr txBox="1"/>
-          <p:nvPr/>
-        </p:nvSpPr>
-        <p:spPr>
-          <a:xfrm>
-            <a:off x="7100000" y="2800000"/>
-            <a:ext cx="4200000" cy="1100000"/>
-          </a:xfrm>
-          <a:prstGeom prst="rect">
-            <a:avLst/>
-          </a:prstGeom>
-          <a:noFill/>
-        </p:spPr>
-        <p:txBody>
-          <a:bodyPr wrap="square">
-            <a:spAutoFit/>
-          </a:bodyPr>
-          <a:lstStyle/>
-          <a:p>
-            <a:pPr algn="l"/>
-            <a:r>
-              <a:rPr sz="1600" b="0">
-                <a:solidFill>
-                  <a:srgbClr val="1A1714"/>
-                </a:solidFill>
-                <a:latin typeface="DM Sans"/>
-              </a:rPr>
-              <a:t>②  Best-ever displayed alongside current.</a:t>
-            </a:r>
-          </a:p>
-        </p:txBody>
-      </p:sp>
-      <p:sp>
-        <p:nvSpPr>
-          <p:cNvPr id="6" name="TextBox 5"/>
-          <p:cNvSpPr txBox="1"/>
-          <p:nvPr/>
-        </p:nvSpPr>
-        <p:spPr>
-          <a:xfrm>
-            <a:off x="7100000" y="4100000"/>
-            <a:ext cx="4200000" cy="1100000"/>
-          </a:xfrm>
-          <a:prstGeom prst="rect">
-            <a:avLst/>
-          </a:prstGeom>
-          <a:noFill/>
-        </p:spPr>
-        <p:txBody>
-          <a:bodyPr wrap="square">
-            <a:spAutoFit/>
-          </a:bodyPr>
-          <a:lstStyle/>
-          <a:p>
-            <a:pPr algn="l"/>
-            <a:r>
-              <a:rPr sz="1600" b="0">
-                <a:solidFill>
-                  <a:srgbClr val="1A1714"/>
-                </a:solidFill>
-                <a:latin typeface="DM Sans"/>
-              </a:rPr>
-              <a:t>③  Quietly celebratory, not gamified-to-death.</a:t>
-            </a:r>
-          </a:p>
-        </p:txBody>
-      </p:sp>
-      <p:sp>
-        <p:nvSpPr>
-          <p:cNvPr id="7" name="TextBox 6"/>
-          <p:cNvSpPr txBox="1"/>
-          <p:nvPr/>
-        </p:nvSpPr>
-        <p:spPr>
-          <a:xfrm>
-            <a:off x="800000" y="6100000"/>
-            <a:ext cx="10500000" cy="300000"/>
-          </a:xfrm>
-          <a:prstGeom prst="rect">
-            <a:avLst/>
-          </a:prstGeom>
-          <a:noFill/>
-        </p:spPr>
-        <p:txBody>
-          <a:bodyPr wrap="square">
-            <a:spAutoFit/>
-          </a:bodyPr>
-          <a:lstStyle/>
-          <a:p>
-            <a:pPr algn="l"/>
-            <a:r>
-              <a:rPr sz="1100" b="0">
-                <a:solidFill>
-                  <a:srgbClr val="8B6B22"/>
-                </a:solidFill>
-                <a:latin typeface="DM Sans"/>
-              </a:rPr>
-              <a:t>Clock page hero — streak module.</a:t>
-            </a:r>
-          </a:p>
-        </p:txBody>
-      </p:sp>
-      <p:sp>
-        <p:nvSpPr>
-          <p:cNvPr id="8" name="TextBox 7"/>
-          <p:cNvSpPr txBox="1"/>
-          <p:nvPr/>
-        </p:nvSpPr>
-        <p:spPr>
-          <a:xfrm>
-            <a:off x="8000000" y="6500000"/>
-            <a:ext cx="4000000" cy="300000"/>
-          </a:xfrm>
-          <a:prstGeom prst="rect">
-            <a:avLst/>
-          </a:prstGeom>
-          <a:noFill/>
-        </p:spPr>
-        <p:txBody>
-          <a:bodyPr wrap="square">
-            <a:spAutoFit/>
-          </a:bodyPr>
-          <a:lstStyle/>
-          <a:p>
-            <a:pPr algn="r"/>
-            <a:r>
-              <a:rPr sz="1100" b="0">
-                <a:solidFill>
-                  <a:srgbClr val="D8CFBE"/>
-                </a:solidFill>
-                <a:latin typeface="DM Sans"/>
-              </a:rPr>
-              <a:t>STAFF · Staff Attendance · 10/15</a:t>
-            </a:r>
-          </a:p>
-        </p:txBody>
-      </p:sp>
-    </p:spTree>
-  </p:cSld>
-  <p:clrMapOvr>
-    <a:masterClrMapping/>
-  </p:clrMapOvr>
-</p:sld>
-</file>
-
-<file path=ppt/slides/slide11.xml><?xml version="1.0" encoding="utf-8"?>
-<p:sld xmlns:a="http://schemas.openxmlformats.org/drawingml/2006/main" xmlns:p="http://schemas.openxmlformats.org/presentationml/2006/main" xmlns:r="http://schemas.openxmlformats.org/officeDocument/2006/relationships">
-  <p:cSld>
-    <p:bg>
-      <p:bgPr>
-        <a:solidFill>
-          <a:srgbClr val="F6F1E7"/>
-        </a:solidFill>
-        <a:effectLst/>
-      </p:bgPr>
-    </p:bg>
-    <p:spTree>
-      <p:nvGrpSpPr>
-        <p:cNvPr id="1" name=""/>
-        <p:cNvGrpSpPr/>
-        <p:nvPr/>
-      </p:nvGrpSpPr>
-      <p:grpSpPr/>
-      <p:sp>
-        <p:nvSpPr>
-          <p:cNvPr id="2" name="TextBox 1"/>
-          <p:cNvSpPr txBox="1"/>
-          <p:nvPr/>
-        </p:nvSpPr>
-        <p:spPr>
-          <a:xfrm>
-            <a:off x="1200000" y="2200000"/>
-            <a:ext cx="9700000" cy="1500000"/>
-          </a:xfrm>
-          <a:prstGeom prst="rect">
-            <a:avLst/>
-          </a:prstGeom>
-          <a:noFill/>
-        </p:spPr>
-        <p:txBody>
-          <a:bodyPr wrap="square">
-            <a:spAutoFit/>
-          </a:bodyPr>
-          <a:lstStyle/>
-          <a:p>
-            <a:pPr algn="ctr"/>
-            <a:r>
-              <a:rPr sz="4400" b="1">
-                <a:solidFill>
-                  <a:srgbClr val="0E1411"/>
-                </a:solidFill>
-                <a:latin typeface="Playfair Display"/>
-              </a:rPr>
-              <a:t>Absence is a flow, not a phone call.</a:t>
-            </a:r>
-          </a:p>
-        </p:txBody>
-      </p:sp>
-      <p:pic>
-        <p:nvPicPr>
-          <p:cNvPr id="3" name="Picture 2" descr="gold-deco-hairline.png"/>
-          <p:cNvPicPr>
-            <a:picLocks noChangeAspect="1"/>
-          </p:cNvPicPr>
-          <p:nvPr/>
-        </p:nvPicPr>
-        <p:blipFill>
-          <a:blip r:embed="rId2"/>
-          <a:stretch>
-            <a:fillRect/>
-          </a:stretch>
-        </p:blipFill>
-        <p:spPr>
-          <a:xfrm>
-            <a:off x="5896000" y="3800000"/>
-            <a:ext cx="400000" cy="20000"/>
-          </a:xfrm>
-          <a:prstGeom prst="rect">
-            <a:avLst/>
-          </a:prstGeom>
-        </p:spPr>
-      </p:pic>
-      <p:sp>
-        <p:nvSpPr>
-          <p:cNvPr id="4" name="TextBox 3"/>
-          <p:cNvSpPr txBox="1"/>
-          <p:nvPr/>
-        </p:nvSpPr>
-        <p:spPr>
-          <a:xfrm>
-            <a:off x="1500000" y="4100000"/>
-            <a:ext cx="9100000" cy="1200000"/>
-          </a:xfrm>
-          <a:prstGeom prst="rect">
-            <a:avLst/>
-          </a:prstGeom>
-          <a:noFill/>
-        </p:spPr>
-        <p:txBody>
-          <a:bodyPr wrap="square">
-            <a:spAutoFit/>
-          </a:bodyPr>
-          <a:lstStyle/>
-          <a:p>
-            <a:pPr algn="ctr"/>
-            <a:r>
-              <a:rPr sz="2200" b="0">
-                <a:solidFill>
-                  <a:srgbClr val="1A1714"/>
-                </a:solidFill>
-                <a:latin typeface="DM Sans"/>
-              </a:rPr>
-              <a:t>Sick, family emergency, transport, other. Optional note. Optional return date.</a:t>
-            </a:r>
-          </a:p>
-        </p:txBody>
-      </p:sp>
-      <p:sp>
-        <p:nvSpPr>
-          <p:cNvPr id="5" name="TextBox 4"/>
-          <p:cNvSpPr txBox="1"/>
-          <p:nvPr/>
-        </p:nvSpPr>
-        <p:spPr>
-          <a:xfrm>
-            <a:off x="8000000" y="6500000"/>
-            <a:ext cx="4000000" cy="300000"/>
-          </a:xfrm>
-          <a:prstGeom prst="rect">
-            <a:avLst/>
-          </a:prstGeom>
-          <a:noFill/>
-        </p:spPr>
-        <p:txBody>
-          <a:bodyPr wrap="square">
-            <a:spAutoFit/>
-          </a:bodyPr>
-          <a:lstStyle/>
-          <a:p>
-            <a:pPr algn="r"/>
-            <a:r>
-              <a:rPr sz="1100" b="0">
-                <a:solidFill>
-                  <a:srgbClr val="D8CFBE"/>
-                </a:solidFill>
-                <a:latin typeface="DM Sans"/>
-              </a:rPr>
-              <a:t>STAFF · Staff Attendance · 11/15</a:t>
-            </a:r>
-          </a:p>
-        </p:txBody>
-      </p:sp>
-    </p:spTree>
-  </p:cSld>
-  <p:clrMapOvr>
-    <a:masterClrMapping/>
-  </p:clrMapOvr>
-</p:sld>
-</file>
-
-<file path=ppt/slides/slide12.xml><?xml version="1.0" encoding="utf-8"?>
-<p:sld xmlns:a="http://schemas.openxmlformats.org/drawingml/2006/main" xmlns:p="http://schemas.openxmlformats.org/presentationml/2006/main" xmlns:r="http://schemas.openxmlformats.org/officeDocument/2006/relationships">
-  <p:cSld>
-    <p:bg>
-      <p:bgPr>
-        <a:solidFill>
-          <a:srgbClr val="F6F1E7"/>
-        </a:solidFill>
-        <a:effectLst/>
-      </p:bgPr>
-    </p:bg>
-    <p:spTree>
-      <p:nvGrpSpPr>
-        <p:cNvPr id="1" name=""/>
-        <p:cNvGrpSpPr/>
-        <p:nvPr/>
-      </p:nvGrpSpPr>
-      <p:grpSpPr/>
-      <p:sp>
-        <p:nvSpPr>
-          <p:cNvPr id="2" name="TextBox 1"/>
-          <p:cNvSpPr txBox="1"/>
-          <p:nvPr/>
-        </p:nvSpPr>
-        <p:spPr>
-          <a:xfrm>
-            <a:off x="1200000" y="2200000"/>
-            <a:ext cx="9700000" cy="1500000"/>
-          </a:xfrm>
-          <a:prstGeom prst="rect">
-            <a:avLst/>
-          </a:prstGeom>
-          <a:noFill/>
-        </p:spPr>
-        <p:txBody>
-          <a:bodyPr wrap="square">
-            <a:spAutoFit/>
-          </a:bodyPr>
-          <a:lstStyle/>
-          <a:p>
-            <a:pPr algn="ctr"/>
-            <a:r>
-              <a:rPr sz="4400" b="1">
-                <a:solidFill>
-                  <a:srgbClr val="0E1411"/>
-                </a:solidFill>
-                <a:latin typeface="Playfair Display"/>
-              </a:rPr>
-              <a:t>Leadership reads the summary, not the spreadsheet.</a:t>
-            </a:r>
-          </a:p>
-        </p:txBody>
-      </p:sp>
-      <p:pic>
-        <p:nvPicPr>
-          <p:cNvPr id="3" name="Picture 2" descr="gold-deco-hairline.png"/>
-          <p:cNvPicPr>
-            <a:picLocks noChangeAspect="1"/>
-          </p:cNvPicPr>
-          <p:nvPr/>
-        </p:nvPicPr>
-        <p:blipFill>
-          <a:blip r:embed="rId2"/>
-          <a:stretch>
-            <a:fillRect/>
-          </a:stretch>
-        </p:blipFill>
-        <p:spPr>
-          <a:xfrm>
-            <a:off x="5896000" y="3800000"/>
-            <a:ext cx="400000" cy="20000"/>
-          </a:xfrm>
-          <a:prstGeom prst="rect">
-            <a:avLst/>
-          </a:prstGeom>
-        </p:spPr>
-      </p:pic>
-      <p:sp>
-        <p:nvSpPr>
-          <p:cNvPr id="4" name="TextBox 3"/>
-          <p:cNvSpPr txBox="1"/>
-          <p:nvPr/>
-        </p:nvSpPr>
-        <p:spPr>
-          <a:xfrm>
-            <a:off x="1500000" y="4100000"/>
-            <a:ext cx="9100000" cy="1200000"/>
-          </a:xfrm>
-          <a:prstGeom prst="rect">
-            <a:avLst/>
-          </a:prstGeom>
-          <a:noFill/>
-        </p:spPr>
-        <p:txBody>
-          <a:bodyPr wrap="square">
-            <a:spAutoFit/>
-          </a:bodyPr>
-          <a:lstStyle/>
-          <a:p>
-            <a:pPr algn="ctr"/>
-            <a:r>
-              <a:rPr sz="2200" b="0">
-                <a:solidFill>
-                  <a:srgbClr val="1A1714"/>
-                </a:solidFill>
-                <a:latin typeface="DM Sans"/>
-              </a:rPr>
-              <a:t>Telegram message at 9:00 AM weekdays. Per-directorate breakdown. One screen.</a:t>
-            </a:r>
-          </a:p>
-        </p:txBody>
-      </p:sp>
-      <p:sp>
-        <p:nvSpPr>
-          <p:cNvPr id="5" name="TextBox 4"/>
-          <p:cNvSpPr txBox="1"/>
-          <p:nvPr/>
-        </p:nvSpPr>
-        <p:spPr>
-          <a:xfrm>
-            <a:off x="8000000" y="6500000"/>
-            <a:ext cx="4000000" cy="300000"/>
-          </a:xfrm>
-          <a:prstGeom prst="rect">
-            <a:avLst/>
-          </a:prstGeom>
-          <a:noFill/>
-        </p:spPr>
-        <p:txBody>
-          <a:bodyPr wrap="square">
-            <a:spAutoFit/>
-          </a:bodyPr>
-          <a:lstStyle/>
-          <a:p>
-            <a:pPr algn="r"/>
-            <a:r>
-              <a:rPr sz="1100" b="0">
-                <a:solidFill>
-                  <a:srgbClr val="D8CFBE"/>
-                </a:solidFill>
-                <a:latin typeface="DM Sans"/>
-              </a:rPr>
-              <a:t>STAFF · Staff Attendance · 12/15</a:t>
-            </a:r>
-          </a:p>
-        </p:txBody>
-      </p:sp>
-    </p:spTree>
-  </p:cSld>
-  <p:clrMapOvr>
-    <a:masterClrMapping/>
-  </p:clrMapOvr>
-</p:sld>
-</file>
-
-<file path=ppt/slides/slide13.xml><?xml version="1.0" encoding="utf-8"?>
-<p:sld xmlns:a="http://schemas.openxmlformats.org/drawingml/2006/main" xmlns:p="http://schemas.openxmlformats.org/presentationml/2006/main" xmlns:r="http://schemas.openxmlformats.org/officeDocument/2006/relationships">
-  <p:cSld>
-    <p:bg>
-      <p:bgPr>
-        <a:solidFill>
-          <a:srgbClr val="F6F1E7"/>
-        </a:solidFill>
-        <a:effectLst/>
-      </p:bgPr>
-    </p:bg>
-    <p:spTree>
-      <p:nvGrpSpPr>
-        <p:cNvPr id="1" name=""/>
-        <p:cNvGrpSpPr/>
-        <p:nvPr/>
-      </p:nvGrpSpPr>
-      <p:grpSpPr/>
-      <p:sp>
-        <p:nvSpPr>
-          <p:cNvPr id="2" name="TextBox 1"/>
-          <p:cNvSpPr txBox="1"/>
-          <p:nvPr/>
-        </p:nvSpPr>
-        <p:spPr>
-          <a:xfrm>
-            <a:off x="1200000" y="2200000"/>
-            <a:ext cx="9700000" cy="1500000"/>
-          </a:xfrm>
-          <a:prstGeom prst="rect">
-            <a:avLst/>
-          </a:prstGeom>
-          <a:noFill/>
-        </p:spPr>
-        <p:txBody>
-          <a:bodyPr wrap="square">
-            <a:spAutoFit/>
-          </a:bodyPr>
-          <a:lstStyle/>
-          <a:p>
-            <a:pPr algn="ctr"/>
-            <a:r>
-              <a:rPr sz="4400" b="1">
-                <a:solidFill>
-                  <a:srgbClr val="0E1411"/>
-                </a:solidFill>
-                <a:latin typeface="Playfair Display"/>
-              </a:rPr>
-              <a:t>One staff voice on what's changed.</a:t>
-            </a:r>
-          </a:p>
-        </p:txBody>
-      </p:sp>
-      <p:pic>
-        <p:nvPicPr>
-          <p:cNvPr id="3" name="Picture 2" descr="gold-deco-hairline.png"/>
-          <p:cNvPicPr>
-            <a:picLocks noChangeAspect="1"/>
-          </p:cNvPicPr>
-          <p:nvPr/>
-        </p:nvPicPr>
-        <p:blipFill>
-          <a:blip r:embed="rId2"/>
-          <a:stretch>
-            <a:fillRect/>
-          </a:stretch>
-        </p:blipFill>
-        <p:spPr>
-          <a:xfrm>
-            <a:off x="5896000" y="3800000"/>
-            <a:ext cx="400000" cy="20000"/>
-          </a:xfrm>
-          <a:prstGeom prst="rect">
-            <a:avLst/>
-          </a:prstGeom>
-        </p:spPr>
-      </p:pic>
-      <p:sp>
-        <p:nvSpPr>
-          <p:cNvPr id="4" name="TextBox 3"/>
-          <p:cNvSpPr txBox="1"/>
-          <p:nvPr/>
-        </p:nvSpPr>
-        <p:spPr>
-          <a:xfrm>
-            <a:off x="1500000" y="4100000"/>
-            <a:ext cx="9100000" cy="1200000"/>
-          </a:xfrm>
-          <a:prstGeom prst="rect">
-            <a:avLst/>
-          </a:prstGeom>
-          <a:noFill/>
-        </p:spPr>
-        <p:txBody>
-          <a:bodyPr wrap="square">
-            <a:spAutoFit/>
-          </a:bodyPr>
-          <a:lstStyle/>
-          <a:p>
-            <a:pPr algn="ctr"/>
-            <a:r>
-              <a:rPr sz="2200" b="0">
-                <a:solidFill>
-                  <a:srgbClr val="1A1714"/>
-                </a:solidFill>
-                <a:latin typeface="DM Sans"/>
-              </a:rPr>
-              <a:t>"&lt;Q05&gt;"</a:t>
-            </a:r>
-          </a:p>
-        </p:txBody>
-      </p:sp>
-      <p:sp>
-        <p:nvSpPr>
-          <p:cNvPr id="5" name="TextBox 4"/>
-          <p:cNvSpPr txBox="1"/>
-          <p:nvPr/>
-        </p:nvSpPr>
-        <p:spPr>
-          <a:xfrm>
-            <a:off x="8000000" y="6500000"/>
-            <a:ext cx="4000000" cy="300000"/>
-          </a:xfrm>
-          <a:prstGeom prst="rect">
-            <a:avLst/>
-          </a:prstGeom>
-          <a:noFill/>
-        </p:spPr>
-        <p:txBody>
-          <a:bodyPr wrap="square">
-            <a:spAutoFit/>
-          </a:bodyPr>
-          <a:lstStyle/>
-          <a:p>
-            <a:pPr algn="r"/>
-            <a:r>
-              <a:rPr sz="1100" b="0">
-                <a:solidFill>
-                  <a:srgbClr val="D8CFBE"/>
-                </a:solidFill>
-                <a:latin typeface="DM Sans"/>
-              </a:rPr>
-              <a:t>STAFF · Staff Attendance · 13/15</a:t>
-            </a:r>
-          </a:p>
-        </p:txBody>
-      </p:sp>
-    </p:spTree>
-  </p:cSld>
-  <p:clrMapOvr>
-    <a:masterClrMapping/>
-  </p:clrMapOvr>
-</p:sld>
-</file>
-
-<file path=ppt/slides/slide14.xml><?xml version="1.0" encoding="utf-8"?>
-<p:sld xmlns:a="http://schemas.openxmlformats.org/drawingml/2006/main" xmlns:p="http://schemas.openxmlformats.org/presentationml/2006/main" xmlns:r="http://schemas.openxmlformats.org/officeDocument/2006/relationships">
-  <p:cSld>
-    <p:bg>
-      <p:bgPr>
-        <a:solidFill>
-          <a:srgbClr val="0E1411"/>
-        </a:solidFill>
-        <a:effectLst/>
-      </p:bgPr>
-    </p:bg>
-    <p:spTree>
-      <p:nvGrpSpPr>
-        <p:cNvPr id="1" name=""/>
-        <p:cNvGrpSpPr/>
-        <p:nvPr/>
-      </p:nvGrpSpPr>
-      <p:grpSpPr/>
-      <p:pic>
-        <p:nvPicPr>
-          <p:cNvPr id="2" name="Picture 1" descr="kente-texture-overlay.png"/>
+          <p:cNvPr id="2" name="Picture 1" descr="slide_01.png"/>
           <p:cNvPicPr>
             <a:picLocks noChangeAspect="1"/>
           </p:cNvPicPr>
@@ -4138,41 +3126,6 @@
           </a:prstGeom>
         </p:spPr>
       </p:pic>
-      <p:sp>
-        <p:nvSpPr>
-          <p:cNvPr id="3" name="TextBox 2"/>
-          <p:cNvSpPr txBox="1"/>
-          <p:nvPr/>
-        </p:nvSpPr>
-        <p:spPr>
-          <a:xfrm>
-            <a:off x="1600000" y="2800000"/>
-            <a:ext cx="8900000" cy="2000000"/>
-          </a:xfrm>
-          <a:prstGeom prst="rect">
-            <a:avLst/>
-          </a:prstGeom>
-          <a:noFill/>
-        </p:spPr>
-        <p:txBody>
-          <a:bodyPr wrap="square">
-            <a:spAutoFit/>
-          </a:bodyPr>
-          <a:lstStyle/>
-          <a:p>
-            <a:pPr algn="ctr"/>
-            <a:r>
-              <a:rPr sz="4400" b="0">
-                <a:solidFill>
-                  <a:srgbClr val="F6F1E7"/>
-                </a:solidFill>
-                <a:latin typeface="Playfair Display"/>
-              </a:rPr>
-              <a:t>Attendance is dignity. SmartGate treats it that way.</a:t>
-            </a:r>
-          </a:p>
-        </p:txBody>
-      </p:sp>
     </p:spTree>
   </p:cSld>
   <p:clrMapOvr>
@@ -4181,288 +3134,9 @@
 </p:sld>
 </file>
 
-<file path=ppt/slides/slide15.xml><?xml version="1.0" encoding="utf-8"?>
+<file path=ppt/slides/slide10.xml><?xml version="1.0" encoding="utf-8"?>
 <p:sld xmlns:a="http://schemas.openxmlformats.org/drawingml/2006/main" xmlns:p="http://schemas.openxmlformats.org/presentationml/2006/main" xmlns:r="http://schemas.openxmlformats.org/officeDocument/2006/relationships">
   <p:cSld>
-    <p:bg>
-      <p:bgPr>
-        <a:solidFill>
-          <a:srgbClr val="F6F1E7"/>
-        </a:solidFill>
-        <a:effectLst/>
-      </p:bgPr>
-    </p:bg>
-    <p:spTree>
-      <p:nvGrpSpPr>
-        <p:cNvPr id="1" name=""/>
-        <p:cNvGrpSpPr/>
-        <p:nvPr/>
-      </p:nvGrpSpPr>
-      <p:grpSpPr/>
-      <p:sp>
-        <p:nvSpPr>
-          <p:cNvPr id="2" name="TextBox 1"/>
-          <p:cNvSpPr txBox="1"/>
-          <p:nvPr/>
-        </p:nvSpPr>
-        <p:spPr>
-          <a:xfrm>
-            <a:off x="1000000" y="800000"/>
-            <a:ext cx="10000000" cy="700000"/>
-          </a:xfrm>
-          <a:prstGeom prst="rect">
-            <a:avLst/>
-          </a:prstGeom>
-          <a:noFill/>
-        </p:spPr>
-        <p:txBody>
-          <a:bodyPr wrap="square">
-            <a:spAutoFit/>
-          </a:bodyPr>
-          <a:lstStyle/>
-          <a:p>
-            <a:pPr algn="l"/>
-            <a:r>
-              <a:rPr sz="4400" b="1">
-                <a:solidFill>
-                  <a:srgbClr val="0E1411"/>
-                </a:solidFill>
-                <a:latin typeface="Playfair Display"/>
-              </a:rPr>
-              <a:t>Appendix</a:t>
-            </a:r>
-          </a:p>
-        </p:txBody>
-      </p:sp>
-      <p:sp>
-        <p:nvSpPr>
-          <p:cNvPr id="3" name="TextBox 2"/>
-          <p:cNvSpPr txBox="1"/>
-          <p:nvPr/>
-        </p:nvSpPr>
-        <p:spPr>
-          <a:xfrm>
-            <a:off x="1000000" y="2000000"/>
-            <a:ext cx="5000000" cy="400000"/>
-          </a:xfrm>
-          <a:prstGeom prst="rect">
-            <a:avLst/>
-          </a:prstGeom>
-          <a:noFill/>
-        </p:spPr>
-        <p:txBody>
-          <a:bodyPr wrap="square">
-            <a:spAutoFit/>
-          </a:bodyPr>
-          <a:lstStyle/>
-          <a:p>
-            <a:pPr algn="l"/>
-            <a:r>
-              <a:rPr sz="1800" b="1">
-                <a:solidFill>
-                  <a:srgbClr val="8B6B22"/>
-                </a:solidFill>
-                <a:latin typeface="DM Sans"/>
-              </a:rPr>
-              <a:t>Live URLs</a:t>
-            </a:r>
-          </a:p>
-        </p:txBody>
-      </p:sp>
-      <p:sp>
-        <p:nvSpPr>
-          <p:cNvPr id="4" name="TextBox 3"/>
-          <p:cNvSpPr txBox="1"/>
-          <p:nvPr/>
-        </p:nvSpPr>
-        <p:spPr>
-          <a:xfrm>
-            <a:off x="1000000" y="2500000"/>
-            <a:ext cx="5000000" cy="400000"/>
-          </a:xfrm>
-          <a:prstGeom prst="rect">
-            <a:avLst/>
-          </a:prstGeom>
-          <a:noFill/>
-        </p:spPr>
-        <p:txBody>
-          <a:bodyPr wrap="square">
-            <a:spAutoFit/>
-          </a:bodyPr>
-          <a:lstStyle/>
-          <a:p>
-            <a:pPr algn="l"/>
-            <a:r>
-              <a:rPr sz="1400" b="0">
-                <a:solidFill>
-                  <a:srgbClr val="1A1714"/>
-                </a:solidFill>
-                <a:latin typeface="DM Sans"/>
-              </a:rPr>
-              <a:t>staff-attendance.pages.dev</a:t>
-            </a:r>
-          </a:p>
-        </p:txBody>
-      </p:sp>
-      <p:sp>
-        <p:nvSpPr>
-          <p:cNvPr id="5" name="TextBox 4"/>
-          <p:cNvSpPr txBox="1"/>
-          <p:nvPr/>
-        </p:nvSpPr>
-        <p:spPr>
-          <a:xfrm>
-            <a:off x="7000000" y="2000000"/>
-            <a:ext cx="5000000" cy="400000"/>
-          </a:xfrm>
-          <a:prstGeom prst="rect">
-            <a:avLst/>
-          </a:prstGeom>
-          <a:noFill/>
-        </p:spPr>
-        <p:txBody>
-          <a:bodyPr wrap="square">
-            <a:spAutoFit/>
-          </a:bodyPr>
-          <a:lstStyle/>
-          <a:p>
-            <a:pPr algn="l"/>
-            <a:r>
-              <a:rPr sz="1800" b="1">
-                <a:solidFill>
-                  <a:srgbClr val="8B6B22"/>
-                </a:solidFill>
-                <a:latin typeface="DM Sans"/>
-              </a:rPr>
-              <a:t>Related decks</a:t>
-            </a:r>
-          </a:p>
-        </p:txBody>
-      </p:sp>
-      <p:sp>
-        <p:nvSpPr>
-          <p:cNvPr id="6" name="TextBox 5"/>
-          <p:cNvSpPr txBox="1"/>
-          <p:nvPr/>
-        </p:nvSpPr>
-        <p:spPr>
-          <a:xfrm>
-            <a:off x="7000000" y="2500000"/>
-            <a:ext cx="5000000" cy="400000"/>
-          </a:xfrm>
-          <a:prstGeom prst="rect">
-            <a:avLst/>
-          </a:prstGeom>
-          <a:noFill/>
-        </p:spPr>
-        <p:txBody>
-          <a:bodyPr wrap="square">
-            <a:spAutoFit/>
-          </a:bodyPr>
-          <a:lstStyle/>
-          <a:p>
-            <a:pPr algn="l"/>
-            <a:r>
-              <a:rPr sz="1400" b="0">
-                <a:solidFill>
-                  <a:srgbClr val="1A1714"/>
-                </a:solidFill>
-                <a:latin typeface="DM Sans"/>
-              </a:rPr>
-              <a:t>Companion deck — SmartGate: Visitor Management in Production</a:t>
-            </a:r>
-          </a:p>
-        </p:txBody>
-      </p:sp>
-      <p:sp>
-        <p:nvSpPr>
-          <p:cNvPr id="7" name="TextBox 6"/>
-          <p:cNvSpPr txBox="1"/>
-          <p:nvPr/>
-        </p:nvSpPr>
-        <p:spPr>
-          <a:xfrm>
-            <a:off x="1000000" y="6300000"/>
-            <a:ext cx="10000000" cy="400000"/>
-          </a:xfrm>
-          <a:prstGeom prst="rect">
-            <a:avLst/>
-          </a:prstGeom>
-          <a:noFill/>
-        </p:spPr>
-        <p:txBody>
-          <a:bodyPr wrap="square">
-            <a:spAutoFit/>
-          </a:bodyPr>
-          <a:lstStyle/>
-          <a:p>
-            <a:pPr algn="ctr"/>
-            <a:r>
-              <a:rPr sz="1100" b="0">
-                <a:solidFill>
-                  <a:srgbClr val="8B6B22"/>
-                </a:solidFill>
-                <a:latin typeface="DM Sans"/>
-              </a:rPr>
-              <a:t>Built on Cloudflare's edge · Designed in the Kente Executive language</a:t>
-            </a:r>
-          </a:p>
-        </p:txBody>
-      </p:sp>
-      <p:sp>
-        <p:nvSpPr>
-          <p:cNvPr id="8" name="TextBox 7"/>
-          <p:cNvSpPr txBox="1"/>
-          <p:nvPr/>
-        </p:nvSpPr>
-        <p:spPr>
-          <a:xfrm>
-            <a:off x="8000000" y="6500000"/>
-            <a:ext cx="4000000" cy="300000"/>
-          </a:xfrm>
-          <a:prstGeom prst="rect">
-            <a:avLst/>
-          </a:prstGeom>
-          <a:noFill/>
-        </p:spPr>
-        <p:txBody>
-          <a:bodyPr wrap="square">
-            <a:spAutoFit/>
-          </a:bodyPr>
-          <a:lstStyle/>
-          <a:p>
-            <a:pPr algn="r"/>
-            <a:r>
-              <a:rPr sz="1100" b="0">
-                <a:solidFill>
-                  <a:srgbClr val="D8CFBE"/>
-                </a:solidFill>
-                <a:latin typeface="DM Sans"/>
-              </a:rPr>
-              <a:t>STAFF · Staff Attendance · 15/15</a:t>
-            </a:r>
-          </a:p>
-        </p:txBody>
-      </p:sp>
-    </p:spTree>
-  </p:cSld>
-  <p:clrMapOvr>
-    <a:masterClrMapping/>
-  </p:clrMapOvr>
-</p:sld>
-</file>
-
-<file path=ppt/slides/slide2.xml><?xml version="1.0" encoding="utf-8"?>
-<p:sld xmlns:a="http://schemas.openxmlformats.org/drawingml/2006/main" xmlns:p="http://schemas.openxmlformats.org/presentationml/2006/main" xmlns:r="http://schemas.openxmlformats.org/officeDocument/2006/relationships">
-  <p:cSld>
-    <p:bg>
-      <p:bgPr>
-        <a:solidFill>
-          <a:srgbClr val="0E1411"/>
-        </a:solidFill>
-        <a:effectLst/>
-      </p:bgPr>
-    </p:bg>
     <p:spTree>
       <p:nvGrpSpPr>
         <p:cNvPr id="1" name=""/>
@@ -4472,7 +3146,7 @@
       <p:grpSpPr/>
       <p:pic>
         <p:nvPicPr>
-          <p:cNvPr id="2" name="Picture 1" descr="kente-texture-overlay.png"/>
+          <p:cNvPr id="2" name="Picture 1" descr="slide_10.png"/>
           <p:cNvPicPr>
             <a:picLocks noChangeAspect="1"/>
           </p:cNvPicPr>
@@ -4494,41 +3168,6 @@
           </a:prstGeom>
         </p:spPr>
       </p:pic>
-      <p:sp>
-        <p:nvSpPr>
-          <p:cNvPr id="3" name="TextBox 2"/>
-          <p:cNvSpPr txBox="1"/>
-          <p:nvPr/>
-        </p:nvSpPr>
-        <p:spPr>
-          <a:xfrm>
-            <a:off x="1600000" y="2800000"/>
-            <a:ext cx="8900000" cy="2000000"/>
-          </a:xfrm>
-          <a:prstGeom prst="rect">
-            <a:avLst/>
-          </a:prstGeom>
-          <a:noFill/>
-        </p:spPr>
-        <p:txBody>
-          <a:bodyPr wrap="square">
-            <a:spAutoFit/>
-          </a:bodyPr>
-          <a:lstStyle/>
-          <a:p>
-            <a:pPr algn="ctr"/>
-            <a:r>
-              <a:rPr sz="4400" b="0">
-                <a:solidFill>
-                  <a:srgbClr val="F6F1E7"/>
-                </a:solidFill>
-                <a:latin typeface="Playfair Display"/>
-              </a:rPr>
-              <a:t>A paper sheet records that you were here. Staff Attendance records that you arrived.</a:t>
-            </a:r>
-          </a:p>
-        </p:txBody>
-      </p:sp>
     </p:spTree>
   </p:cSld>
   <p:clrMapOvr>
@@ -4537,1003 +3176,9 @@
 </p:sld>
 </file>
 
-<file path=ppt/slides/slide3.xml><?xml version="1.0" encoding="utf-8"?>
+<file path=ppt/slides/slide11.xml><?xml version="1.0" encoding="utf-8"?>
 <p:sld xmlns:a="http://schemas.openxmlformats.org/drawingml/2006/main" xmlns:p="http://schemas.openxmlformats.org/presentationml/2006/main" xmlns:r="http://schemas.openxmlformats.org/officeDocument/2006/relationships">
   <p:cSld>
-    <p:bg>
-      <p:bgPr>
-        <a:solidFill>
-          <a:srgbClr val="F6F1E7"/>
-        </a:solidFill>
-        <a:effectLst/>
-      </p:bgPr>
-    </p:bg>
-    <p:spTree>
-      <p:nvGrpSpPr>
-        <p:cNvPr id="1" name=""/>
-        <p:cNvGrpSpPr/>
-        <p:nvPr/>
-      </p:nvGrpSpPr>
-      <p:grpSpPr/>
-      <p:sp>
-        <p:nvSpPr>
-          <p:cNvPr id="2" name="TextBox 1"/>
-          <p:cNvSpPr txBox="1"/>
-          <p:nvPr/>
-        </p:nvSpPr>
-        <p:spPr>
-          <a:xfrm>
-            <a:off x="1000000" y="800000"/>
-            <a:ext cx="10000000" cy="800000"/>
-          </a:xfrm>
-          <a:prstGeom prst="rect">
-            <a:avLst/>
-          </a:prstGeom>
-          <a:noFill/>
-        </p:spPr>
-        <p:txBody>
-          <a:bodyPr wrap="square">
-            <a:spAutoFit/>
-          </a:bodyPr>
-          <a:lstStyle/>
-          <a:p>
-            <a:pPr algn="l"/>
-            <a:r>
-              <a:rPr sz="4400" b="1">
-                <a:solidFill>
-                  <a:srgbClr val="0E1411"/>
-                </a:solidFill>
-                <a:latin typeface="Playfair Display"/>
-              </a:rPr>
-              <a:t>What you'll see</a:t>
-            </a:r>
-          </a:p>
-        </p:txBody>
-      </p:sp>
-      <p:sp>
-        <p:nvSpPr>
-          <p:cNvPr id="3" name="TextBox 2"/>
-          <p:cNvSpPr txBox="1"/>
-          <p:nvPr/>
-        </p:nvSpPr>
-        <p:spPr>
-          <a:xfrm>
-            <a:off x="8000000" y="6500000"/>
-            <a:ext cx="4000000" cy="300000"/>
-          </a:xfrm>
-          <a:prstGeom prst="rect">
-            <a:avLst/>
-          </a:prstGeom>
-          <a:noFill/>
-        </p:spPr>
-        <p:txBody>
-          <a:bodyPr wrap="square">
-            <a:spAutoFit/>
-          </a:bodyPr>
-          <a:lstStyle/>
-          <a:p>
-            <a:pPr algn="r"/>
-            <a:r>
-              <a:rPr sz="1100" b="0">
-                <a:solidFill>
-                  <a:srgbClr val="D8CFBE"/>
-                </a:solidFill>
-                <a:latin typeface="DM Sans"/>
-              </a:rPr>
-              <a:t>STAFF · Staff Attendance · 03/15</a:t>
-            </a:r>
-          </a:p>
-        </p:txBody>
-      </p:sp>
-    </p:spTree>
-  </p:cSld>
-  <p:clrMapOvr>
-    <a:masterClrMapping/>
-  </p:clrMapOvr>
-</p:sld>
-</file>
-
-<file path=ppt/slides/slide4.xml><?xml version="1.0" encoding="utf-8"?>
-<p:sld xmlns:a="http://schemas.openxmlformats.org/drawingml/2006/main" xmlns:p="http://schemas.openxmlformats.org/presentationml/2006/main" xmlns:r="http://schemas.openxmlformats.org/officeDocument/2006/relationships">
-  <p:cSld>
-    <p:bg>
-      <p:bgPr>
-        <a:solidFill>
-          <a:srgbClr val="F6F1E7"/>
-        </a:solidFill>
-        <a:effectLst/>
-      </p:bgPr>
-    </p:bg>
-    <p:spTree>
-      <p:nvGrpSpPr>
-        <p:cNvPr id="1" name=""/>
-        <p:cNvGrpSpPr/>
-        <p:nvPr/>
-      </p:nvGrpSpPr>
-      <p:grpSpPr/>
-      <p:sp>
-        <p:nvSpPr>
-          <p:cNvPr id="2" name="TextBox 1"/>
-          <p:cNvSpPr txBox="1"/>
-          <p:nvPr/>
-        </p:nvSpPr>
-        <p:spPr>
-          <a:xfrm>
-            <a:off x="1200000" y="2200000"/>
-            <a:ext cx="9700000" cy="1500000"/>
-          </a:xfrm>
-          <a:prstGeom prst="rect">
-            <a:avLst/>
-          </a:prstGeom>
-          <a:noFill/>
-        </p:spPr>
-        <p:txBody>
-          <a:bodyPr wrap="square">
-            <a:spAutoFit/>
-          </a:bodyPr>
-          <a:lstStyle/>
-          <a:p>
-            <a:pPr algn="ctr"/>
-            <a:r>
-              <a:rPr sz="4400" b="1">
-                <a:solidFill>
-                  <a:srgbClr val="0E1411"/>
-                </a:solidFill>
-                <a:latin typeface="Playfair Display"/>
-              </a:rPr>
-              <a:t>First login is a moment, not a friction point.</a:t>
-            </a:r>
-          </a:p>
-        </p:txBody>
-      </p:sp>
-      <p:pic>
-        <p:nvPicPr>
-          <p:cNvPr id="3" name="Picture 2" descr="gold-deco-hairline.png"/>
-          <p:cNvPicPr>
-            <a:picLocks noChangeAspect="1"/>
-          </p:cNvPicPr>
-          <p:nvPr/>
-        </p:nvPicPr>
-        <p:blipFill>
-          <a:blip r:embed="rId2"/>
-          <a:stretch>
-            <a:fillRect/>
-          </a:stretch>
-        </p:blipFill>
-        <p:spPr>
-          <a:xfrm>
-            <a:off x="5896000" y="3800000"/>
-            <a:ext cx="400000" cy="20000"/>
-          </a:xfrm>
-          <a:prstGeom prst="rect">
-            <a:avLst/>
-          </a:prstGeom>
-        </p:spPr>
-      </p:pic>
-      <p:sp>
-        <p:nvSpPr>
-          <p:cNvPr id="4" name="TextBox 3"/>
-          <p:cNvSpPr txBox="1"/>
-          <p:nvPr/>
-        </p:nvSpPr>
-        <p:spPr>
-          <a:xfrm>
-            <a:off x="1500000" y="4100000"/>
-            <a:ext cx="9100000" cy="1200000"/>
-          </a:xfrm>
-          <a:prstGeom prst="rect">
-            <a:avLst/>
-          </a:prstGeom>
-          <a:noFill/>
-        </p:spPr>
-        <p:txBody>
-          <a:bodyPr wrap="square">
-            <a:spAutoFit/>
-          </a:bodyPr>
-          <a:lstStyle/>
-          <a:p>
-            <a:pPr algn="ctr"/>
-            <a:r>
-              <a:rPr sz="2200" b="0">
-                <a:solidFill>
-                  <a:srgbClr val="1A1714"/>
-                </a:solidFill>
-                <a:latin typeface="DM Sans"/>
-              </a:rPr>
-              <a:t>Enforced PIN change with clear language, gentle motion, no jargon.</a:t>
-            </a:r>
-          </a:p>
-        </p:txBody>
-      </p:sp>
-      <p:sp>
-        <p:nvSpPr>
-          <p:cNvPr id="5" name="TextBox 4"/>
-          <p:cNvSpPr txBox="1"/>
-          <p:nvPr/>
-        </p:nvSpPr>
-        <p:spPr>
-          <a:xfrm>
-            <a:off x="8000000" y="6500000"/>
-            <a:ext cx="4000000" cy="300000"/>
-          </a:xfrm>
-          <a:prstGeom prst="rect">
-            <a:avLst/>
-          </a:prstGeom>
-          <a:noFill/>
-        </p:spPr>
-        <p:txBody>
-          <a:bodyPr wrap="square">
-            <a:spAutoFit/>
-          </a:bodyPr>
-          <a:lstStyle/>
-          <a:p>
-            <a:pPr algn="r"/>
-            <a:r>
-              <a:rPr sz="1100" b="0">
-                <a:solidFill>
-                  <a:srgbClr val="D8CFBE"/>
-                </a:solidFill>
-                <a:latin typeface="DM Sans"/>
-              </a:rPr>
-              <a:t>STAFF · Staff Attendance · 04/15</a:t>
-            </a:r>
-          </a:p>
-        </p:txBody>
-      </p:sp>
-    </p:spTree>
-  </p:cSld>
-  <p:clrMapOvr>
-    <a:masterClrMapping/>
-  </p:clrMapOvr>
-</p:sld>
-</file>
-
-<file path=ppt/slides/slide5.xml><?xml version="1.0" encoding="utf-8"?>
-<p:sld xmlns:a="http://schemas.openxmlformats.org/drawingml/2006/main" xmlns:p="http://schemas.openxmlformats.org/presentationml/2006/main" xmlns:r="http://schemas.openxmlformats.org/officeDocument/2006/relationships">
-  <p:cSld>
-    <p:bg>
-      <p:bgPr>
-        <a:solidFill>
-          <a:srgbClr val="F6F1E7"/>
-        </a:solidFill>
-        <a:effectLst/>
-      </p:bgPr>
-    </p:bg>
-    <p:spTree>
-      <p:nvGrpSpPr>
-        <p:cNvPr id="1" name=""/>
-        <p:cNvGrpSpPr/>
-        <p:nvPr/>
-      </p:nvGrpSpPr>
-      <p:grpSpPr/>
-      <p:sp>
-        <p:nvSpPr>
-          <p:cNvPr id="2" name="TextBox 1"/>
-          <p:cNvSpPr txBox="1"/>
-          <p:nvPr/>
-        </p:nvSpPr>
-        <p:spPr>
-          <a:xfrm>
-            <a:off x="1200000" y="2200000"/>
-            <a:ext cx="9700000" cy="1500000"/>
-          </a:xfrm>
-          <a:prstGeom prst="rect">
-            <a:avLst/>
-          </a:prstGeom>
-          <a:noFill/>
-        </p:spPr>
-        <p:txBody>
-          <a:bodyPr wrap="square">
-            <a:spAutoFit/>
-          </a:bodyPr>
-          <a:lstStyle/>
-          <a:p>
-            <a:pPr algn="ctr"/>
-            <a:r>
-              <a:rPr sz="4400" b="1">
-                <a:solidFill>
-                  <a:srgbClr val="0E1411"/>
-                </a:solidFill>
-                <a:latin typeface="Playfair Display"/>
-              </a:rPr>
-              <a:t>The 75-metre circle isn't a circle.</a:t>
-            </a:r>
-          </a:p>
-        </p:txBody>
-      </p:sp>
-      <p:pic>
-        <p:nvPicPr>
-          <p:cNvPr id="3" name="Picture 2" descr="gold-deco-hairline.png"/>
-          <p:cNvPicPr>
-            <a:picLocks noChangeAspect="1"/>
-          </p:cNvPicPr>
-          <p:nvPr/>
-        </p:nvPicPr>
-        <p:blipFill>
-          <a:blip r:embed="rId2"/>
-          <a:stretch>
-            <a:fillRect/>
-          </a:stretch>
-        </p:blipFill>
-        <p:spPr>
-          <a:xfrm>
-            <a:off x="5896000" y="3800000"/>
-            <a:ext cx="400000" cy="20000"/>
-          </a:xfrm>
-          <a:prstGeom prst="rect">
-            <a:avLst/>
-          </a:prstGeom>
-        </p:spPr>
-      </p:pic>
-      <p:sp>
-        <p:nvSpPr>
-          <p:cNvPr id="4" name="TextBox 3"/>
-          <p:cNvSpPr txBox="1"/>
-          <p:nvPr/>
-        </p:nvSpPr>
-        <p:spPr>
-          <a:xfrm>
-            <a:off x="1500000" y="4100000"/>
-            <a:ext cx="9100000" cy="1200000"/>
-          </a:xfrm>
-          <a:prstGeom prst="rect">
-            <a:avLst/>
-          </a:prstGeom>
-          <a:noFill/>
-        </p:spPr>
-        <p:txBody>
-          <a:bodyPr wrap="square">
-            <a:spAutoFit/>
-          </a:bodyPr>
-          <a:lstStyle/>
-          <a:p>
-            <a:pPr algn="ctr"/>
-            <a:r>
-              <a:rPr sz="2200" b="0">
-                <a:solidFill>
-                  <a:srgbClr val="1A1714"/>
-                </a:solidFill>
-                <a:latin typeface="DM Sans"/>
-              </a:rPr>
-              <a:t>It's a circle plus your phone's reported GPS accuracy.</a:t>
-            </a:r>
-          </a:p>
-        </p:txBody>
-      </p:sp>
-      <p:sp>
-        <p:nvSpPr>
-          <p:cNvPr id="5" name="TextBox 4"/>
-          <p:cNvSpPr txBox="1"/>
-          <p:nvPr/>
-        </p:nvSpPr>
-        <p:spPr>
-          <a:xfrm>
-            <a:off x="8000000" y="6500000"/>
-            <a:ext cx="4000000" cy="300000"/>
-          </a:xfrm>
-          <a:prstGeom prst="rect">
-            <a:avLst/>
-          </a:prstGeom>
-          <a:noFill/>
-        </p:spPr>
-        <p:txBody>
-          <a:bodyPr wrap="square">
-            <a:spAutoFit/>
-          </a:bodyPr>
-          <a:lstStyle/>
-          <a:p>
-            <a:pPr algn="r"/>
-            <a:r>
-              <a:rPr sz="1100" b="0">
-                <a:solidFill>
-                  <a:srgbClr val="D8CFBE"/>
-                </a:solidFill>
-                <a:latin typeface="DM Sans"/>
-              </a:rPr>
-              <a:t>STAFF · Staff Attendance · 05/15</a:t>
-            </a:r>
-          </a:p>
-        </p:txBody>
-      </p:sp>
-    </p:spTree>
-  </p:cSld>
-  <p:clrMapOvr>
-    <a:masterClrMapping/>
-  </p:clrMapOvr>
-</p:sld>
-</file>
-
-<file path=ppt/slides/slide6.xml><?xml version="1.0" encoding="utf-8"?>
-<p:sld xmlns:a="http://schemas.openxmlformats.org/drawingml/2006/main" xmlns:p="http://schemas.openxmlformats.org/presentationml/2006/main" xmlns:r="http://schemas.openxmlformats.org/officeDocument/2006/relationships">
-  <p:cSld>
-    <p:bg>
-      <p:bgPr>
-        <a:solidFill>
-          <a:srgbClr val="F6F1E7"/>
-        </a:solidFill>
-        <a:effectLst/>
-      </p:bgPr>
-    </p:bg>
-    <p:spTree>
-      <p:nvGrpSpPr>
-        <p:cNvPr id="1" name=""/>
-        <p:cNvGrpSpPr/>
-        <p:nvPr/>
-      </p:nvGrpSpPr>
-      <p:grpSpPr/>
-      <p:sp>
-        <p:nvSpPr>
-          <p:cNvPr id="2" name="TextBox 1"/>
-          <p:cNvSpPr txBox="1"/>
-          <p:nvPr/>
-        </p:nvSpPr>
-        <p:spPr>
-          <a:xfrm>
-            <a:off x="800000" y="500000"/>
-            <a:ext cx="10500000" cy="700000"/>
-          </a:xfrm>
-          <a:prstGeom prst="rect">
-            <a:avLst/>
-          </a:prstGeom>
-          <a:noFill/>
-        </p:spPr>
-        <p:txBody>
-          <a:bodyPr wrap="square">
-            <a:spAutoFit/>
-          </a:bodyPr>
-          <a:lstStyle/>
-          <a:p>
-            <a:pPr algn="l"/>
-            <a:r>
-              <a:rPr sz="3200" b="1">
-                <a:solidFill>
-                  <a:srgbClr val="0E1411"/>
-                </a:solidFill>
-                <a:latin typeface="DM Sans"/>
-              </a:rPr>
-              <a:t>Clock-in, GPS clean</a:t>
-            </a:r>
-          </a:p>
-        </p:txBody>
-      </p:sp>
-      <p:sp>
-        <p:nvSpPr>
-          <p:cNvPr id="3" name="Rectangle 2"/>
-          <p:cNvSpPr/>
-          <p:nvPr/>
-        </p:nvSpPr>
-        <p:spPr>
-          <a:xfrm>
-            <a:off x="800000" y="1500000"/>
-            <a:ext cx="5800000" cy="4500000"/>
-          </a:xfrm>
-          <a:prstGeom prst="rect">
-            <a:avLst/>
-          </a:prstGeom>
-          <a:solidFill>
-            <a:srgbClr val="FBF7EF"/>
-          </a:solidFill>
-          <a:ln>
-            <a:solidFill>
-              <a:srgbClr val="D8CFBE"/>
-            </a:solidFill>
-          </a:ln>
-        </p:spPr>
-        <p:style>
-          <a:lnRef idx="1">
-            <a:schemeClr val="accent1"/>
-          </a:lnRef>
-          <a:fillRef idx="3">
-            <a:schemeClr val="accent1"/>
-          </a:fillRef>
-          <a:effectRef idx="2">
-            <a:schemeClr val="accent1"/>
-          </a:effectRef>
-          <a:fontRef idx="minor">
-            <a:schemeClr val="lt1"/>
-          </a:fontRef>
-        </p:style>
-        <p:txBody>
-          <a:bodyPr rtlCol="0" anchor="ctr"/>
-          <a:lstStyle/>
-          <a:p>
-            <a:pPr algn="ctr"/>
-            <a:r>
-              <a:rPr sz="1100">
-                <a:solidFill>
-                  <a:srgbClr val="8B6B22"/>
-                </a:solidFill>
-                <a:latin typeface="DM Sans"/>
-              </a:rPr>
-              <a:t>[REPLACE: S08-clockin-success.png]</a:t>
-            </a:r>
-          </a:p>
-        </p:txBody>
-      </p:sp>
-      <p:sp>
-        <p:nvSpPr>
-          <p:cNvPr id="4" name="TextBox 3"/>
-          <p:cNvSpPr txBox="1"/>
-          <p:nvPr/>
-        </p:nvSpPr>
-        <p:spPr>
-          <a:xfrm>
-            <a:off x="7100000" y="1500000"/>
-            <a:ext cx="4200000" cy="1100000"/>
-          </a:xfrm>
-          <a:prstGeom prst="rect">
-            <a:avLst/>
-          </a:prstGeom>
-          <a:noFill/>
-        </p:spPr>
-        <p:txBody>
-          <a:bodyPr wrap="square">
-            <a:spAutoFit/>
-          </a:bodyPr>
-          <a:lstStyle/>
-          <a:p>
-            <a:pPr algn="l"/>
-            <a:r>
-              <a:rPr sz="1600" b="0">
-                <a:solidFill>
-                  <a:srgbClr val="1A1714"/>
-                </a:solidFill>
-                <a:latin typeface="DM Sans"/>
-              </a:rPr>
-              <a:t>①  Accuracy ≤15m, inside fence — instant approval.</a:t>
-            </a:r>
-          </a:p>
-        </p:txBody>
-      </p:sp>
-      <p:sp>
-        <p:nvSpPr>
-          <p:cNvPr id="5" name="TextBox 4"/>
-          <p:cNvSpPr txBox="1"/>
-          <p:nvPr/>
-        </p:nvSpPr>
-        <p:spPr>
-          <a:xfrm>
-            <a:off x="7100000" y="2800000"/>
-            <a:ext cx="4200000" cy="1100000"/>
-          </a:xfrm>
-          <a:prstGeom prst="rect">
-            <a:avLst/>
-          </a:prstGeom>
-          <a:noFill/>
-        </p:spPr>
-        <p:txBody>
-          <a:bodyPr wrap="square">
-            <a:spAutoFit/>
-          </a:bodyPr>
-          <a:lstStyle/>
-          <a:p>
-            <a:pPr algn="l"/>
-            <a:r>
-              <a:rPr sz="1600" b="0">
-                <a:solidFill>
-                  <a:srgbClr val="1A1714"/>
-                </a:solidFill>
-                <a:latin typeface="DM Sans"/>
-              </a:rPr>
-              <a:t>②  Camera-verified selfie on capture.</a:t>
-            </a:r>
-          </a:p>
-        </p:txBody>
-      </p:sp>
-      <p:sp>
-        <p:nvSpPr>
-          <p:cNvPr id="6" name="TextBox 5"/>
-          <p:cNvSpPr txBox="1"/>
-          <p:nvPr/>
-        </p:nvSpPr>
-        <p:spPr>
-          <a:xfrm>
-            <a:off x="7100000" y="4100000"/>
-            <a:ext cx="4200000" cy="1100000"/>
-          </a:xfrm>
-          <a:prstGeom prst="rect">
-            <a:avLst/>
-          </a:prstGeom>
-          <a:noFill/>
-        </p:spPr>
-        <p:txBody>
-          <a:bodyPr wrap="square">
-            <a:spAutoFit/>
-          </a:bodyPr>
-          <a:lstStyle/>
-          <a:p>
-            <a:pPr algn="l"/>
-            <a:r>
-              <a:rPr sz="1600" b="0">
-                <a:solidFill>
-                  <a:srgbClr val="1A1714"/>
-                </a:solidFill>
-                <a:latin typeface="DM Sans"/>
-              </a:rPr>
-              <a:t>③  Streak counter ticks.</a:t>
-            </a:r>
-          </a:p>
-        </p:txBody>
-      </p:sp>
-      <p:sp>
-        <p:nvSpPr>
-          <p:cNvPr id="7" name="TextBox 6"/>
-          <p:cNvSpPr txBox="1"/>
-          <p:nvPr/>
-        </p:nvSpPr>
-        <p:spPr>
-          <a:xfrm>
-            <a:off x="800000" y="6100000"/>
-            <a:ext cx="10500000" cy="300000"/>
-          </a:xfrm>
-          <a:prstGeom prst="rect">
-            <a:avLst/>
-          </a:prstGeom>
-          <a:noFill/>
-        </p:spPr>
-        <p:txBody>
-          <a:bodyPr wrap="square">
-            <a:spAutoFit/>
-          </a:bodyPr>
-          <a:lstStyle/>
-          <a:p>
-            <a:pPr algn="l"/>
-            <a:r>
-              <a:rPr sz="1100" b="0">
-                <a:solidFill>
-                  <a:srgbClr val="8B6B22"/>
-                </a:solidFill>
-                <a:latin typeface="DM Sans"/>
-              </a:rPr>
-              <a:t>Typical clock-in, captured live.</a:t>
-            </a:r>
-          </a:p>
-        </p:txBody>
-      </p:sp>
-      <p:sp>
-        <p:nvSpPr>
-          <p:cNvPr id="8" name="TextBox 7"/>
-          <p:cNvSpPr txBox="1"/>
-          <p:nvPr/>
-        </p:nvSpPr>
-        <p:spPr>
-          <a:xfrm>
-            <a:off x="8000000" y="6500000"/>
-            <a:ext cx="4000000" cy="300000"/>
-          </a:xfrm>
-          <a:prstGeom prst="rect">
-            <a:avLst/>
-          </a:prstGeom>
-          <a:noFill/>
-        </p:spPr>
-        <p:txBody>
-          <a:bodyPr wrap="square">
-            <a:spAutoFit/>
-          </a:bodyPr>
-          <a:lstStyle/>
-          <a:p>
-            <a:pPr algn="r"/>
-            <a:r>
-              <a:rPr sz="1100" b="0">
-                <a:solidFill>
-                  <a:srgbClr val="D8CFBE"/>
-                </a:solidFill>
-                <a:latin typeface="DM Sans"/>
-              </a:rPr>
-              <a:t>STAFF · Staff Attendance · 06/15</a:t>
-            </a:r>
-          </a:p>
-        </p:txBody>
-      </p:sp>
-    </p:spTree>
-  </p:cSld>
-  <p:clrMapOvr>
-    <a:masterClrMapping/>
-  </p:clrMapOvr>
-</p:sld>
-</file>
-
-<file path=ppt/slides/slide7.xml><?xml version="1.0" encoding="utf-8"?>
-<p:sld xmlns:a="http://schemas.openxmlformats.org/drawingml/2006/main" xmlns:p="http://schemas.openxmlformats.org/presentationml/2006/main" xmlns:r="http://schemas.openxmlformats.org/officeDocument/2006/relationships">
-  <p:cSld>
-    <p:bg>
-      <p:bgPr>
-        <a:solidFill>
-          <a:srgbClr val="F6F1E7"/>
-        </a:solidFill>
-        <a:effectLst/>
-      </p:bgPr>
-    </p:bg>
-    <p:spTree>
-      <p:nvGrpSpPr>
-        <p:cNvPr id="1" name=""/>
-        <p:cNvGrpSpPr/>
-        <p:nvPr/>
-      </p:nvGrpSpPr>
-      <p:grpSpPr/>
-      <p:sp>
-        <p:nvSpPr>
-          <p:cNvPr id="2" name="TextBox 1"/>
-          <p:cNvSpPr txBox="1"/>
-          <p:nvPr/>
-        </p:nvSpPr>
-        <p:spPr>
-          <a:xfrm>
-            <a:off x="800000" y="500000"/>
-            <a:ext cx="10500000" cy="700000"/>
-          </a:xfrm>
-          <a:prstGeom prst="rect">
-            <a:avLst/>
-          </a:prstGeom>
-          <a:noFill/>
-        </p:spPr>
-        <p:txBody>
-          <a:bodyPr wrap="square">
-            <a:spAutoFit/>
-          </a:bodyPr>
-          <a:lstStyle/>
-          <a:p>
-            <a:pPr algn="l"/>
-            <a:r>
-              <a:rPr sz="3200" b="1">
-                <a:solidFill>
-                  <a:srgbClr val="0E1411"/>
-                </a:solidFill>
-                <a:latin typeface="DM Sans"/>
-              </a:rPr>
-              <a:t>Clock-in rejected, clearly</a:t>
-            </a:r>
-          </a:p>
-        </p:txBody>
-      </p:sp>
-      <p:sp>
-        <p:nvSpPr>
-          <p:cNvPr id="3" name="Rectangle 2"/>
-          <p:cNvSpPr/>
-          <p:nvPr/>
-        </p:nvSpPr>
-        <p:spPr>
-          <a:xfrm>
-            <a:off x="800000" y="1500000"/>
-            <a:ext cx="5800000" cy="4500000"/>
-          </a:xfrm>
-          <a:prstGeom prst="rect">
-            <a:avLst/>
-          </a:prstGeom>
-          <a:solidFill>
-            <a:srgbClr val="FBF7EF"/>
-          </a:solidFill>
-          <a:ln>
-            <a:solidFill>
-              <a:srgbClr val="D8CFBE"/>
-            </a:solidFill>
-          </a:ln>
-        </p:spPr>
-        <p:style>
-          <a:lnRef idx="1">
-            <a:schemeClr val="accent1"/>
-          </a:lnRef>
-          <a:fillRef idx="3">
-            <a:schemeClr val="accent1"/>
-          </a:fillRef>
-          <a:effectRef idx="2">
-            <a:schemeClr val="accent1"/>
-          </a:effectRef>
-          <a:fontRef idx="minor">
-            <a:schemeClr val="lt1"/>
-          </a:fontRef>
-        </p:style>
-        <p:txBody>
-          <a:bodyPr rtlCol="0" anchor="ctr"/>
-          <a:lstStyle/>
-          <a:p>
-            <a:pPr algn="ctr"/>
-            <a:r>
-              <a:rPr sz="1100">
-                <a:solidFill>
-                  <a:srgbClr val="8B6B22"/>
-                </a:solidFill>
-                <a:latin typeface="DM Sans"/>
-              </a:rPr>
-              <a:t>[REPLACE: S10-clockin-rejected.png]</a:t>
-            </a:r>
-          </a:p>
-        </p:txBody>
-      </p:sp>
-      <p:sp>
-        <p:nvSpPr>
-          <p:cNvPr id="4" name="TextBox 3"/>
-          <p:cNvSpPr txBox="1"/>
-          <p:nvPr/>
-        </p:nvSpPr>
-        <p:spPr>
-          <a:xfrm>
-            <a:off x="7100000" y="1500000"/>
-            <a:ext cx="4200000" cy="1100000"/>
-          </a:xfrm>
-          <a:prstGeom prst="rect">
-            <a:avLst/>
-          </a:prstGeom>
-          <a:noFill/>
-        </p:spPr>
-        <p:txBody>
-          <a:bodyPr wrap="square">
-            <a:spAutoFit/>
-          </a:bodyPr>
-          <a:lstStyle/>
-          <a:p>
-            <a:pPr algn="l"/>
-            <a:r>
-              <a:rPr sz="1600" b="0">
-                <a:solidFill>
-                  <a:srgbClr val="1A1714"/>
-                </a:solidFill>
-                <a:latin typeface="DM Sans"/>
-              </a:rPr>
-              <a:t>①  200m+ outside — clear distance shown.</a:t>
-            </a:r>
-          </a:p>
-        </p:txBody>
-      </p:sp>
-      <p:sp>
-        <p:nvSpPr>
-          <p:cNvPr id="5" name="TextBox 4"/>
-          <p:cNvSpPr txBox="1"/>
-          <p:nvPr/>
-        </p:nvSpPr>
-        <p:spPr>
-          <a:xfrm>
-            <a:off x="7100000" y="2800000"/>
-            <a:ext cx="4200000" cy="1100000"/>
-          </a:xfrm>
-          <a:prstGeom prst="rect">
-            <a:avLst/>
-          </a:prstGeom>
-          <a:noFill/>
-        </p:spPr>
-        <p:txBody>
-          <a:bodyPr wrap="square">
-            <a:spAutoFit/>
-          </a:bodyPr>
-          <a:lstStyle/>
-          <a:p>
-            <a:pPr algn="l"/>
-            <a:r>
-              <a:rPr sz="1600" b="0">
-                <a:solidFill>
-                  <a:srgbClr val="1A1714"/>
-                </a:solidFill>
-                <a:latin typeface="DM Sans"/>
-              </a:rPr>
-              <a:t>②  GPS accuracy shown alongside.</a:t>
-            </a:r>
-          </a:p>
-        </p:txBody>
-      </p:sp>
-      <p:sp>
-        <p:nvSpPr>
-          <p:cNvPr id="6" name="TextBox 5"/>
-          <p:cNvSpPr txBox="1"/>
-          <p:nvPr/>
-        </p:nvSpPr>
-        <p:spPr>
-          <a:xfrm>
-            <a:off x="7100000" y="4100000"/>
-            <a:ext cx="4200000" cy="1100000"/>
-          </a:xfrm>
-          <a:prstGeom prst="rect">
-            <a:avLst/>
-          </a:prstGeom>
-          <a:noFill/>
-        </p:spPr>
-        <p:txBody>
-          <a:bodyPr wrap="square">
-            <a:spAutoFit/>
-          </a:bodyPr>
-          <a:lstStyle/>
-          <a:p>
-            <a:pPr algn="l"/>
-            <a:r>
-              <a:rPr sz="1600" b="0">
-                <a:solidFill>
-                  <a:srgbClr val="1A1714"/>
-                </a:solidFill>
-                <a:latin typeface="DM Sans"/>
-              </a:rPr>
-              <a:t>③  User knows exactly why and where.</a:t>
-            </a:r>
-          </a:p>
-        </p:txBody>
-      </p:sp>
-      <p:sp>
-        <p:nvSpPr>
-          <p:cNvPr id="7" name="TextBox 6"/>
-          <p:cNvSpPr txBox="1"/>
-          <p:nvPr/>
-        </p:nvSpPr>
-        <p:spPr>
-          <a:xfrm>
-            <a:off x="800000" y="6100000"/>
-            <a:ext cx="10500000" cy="300000"/>
-          </a:xfrm>
-          <a:prstGeom prst="rect">
-            <a:avLst/>
-          </a:prstGeom>
-          <a:noFill/>
-        </p:spPr>
-        <p:txBody>
-          <a:bodyPr wrap="square">
-            <a:spAutoFit/>
-          </a:bodyPr>
-          <a:lstStyle/>
-          <a:p>
-            <a:pPr algn="l"/>
-            <a:r>
-              <a:rPr sz="1100" b="0">
-                <a:solidFill>
-                  <a:srgbClr val="8B6B22"/>
-                </a:solidFill>
-                <a:latin typeface="DM Sans"/>
-              </a:rPr>
-              <a:t>Honest rejection, captured.</a:t>
-            </a:r>
-          </a:p>
-        </p:txBody>
-      </p:sp>
-      <p:sp>
-        <p:nvSpPr>
-          <p:cNvPr id="8" name="TextBox 7"/>
-          <p:cNvSpPr txBox="1"/>
-          <p:nvPr/>
-        </p:nvSpPr>
-        <p:spPr>
-          <a:xfrm>
-            <a:off x="8000000" y="6500000"/>
-            <a:ext cx="4000000" cy="300000"/>
-          </a:xfrm>
-          <a:prstGeom prst="rect">
-            <a:avLst/>
-          </a:prstGeom>
-          <a:noFill/>
-        </p:spPr>
-        <p:txBody>
-          <a:bodyPr wrap="square">
-            <a:spAutoFit/>
-          </a:bodyPr>
-          <a:lstStyle/>
-          <a:p>
-            <a:pPr algn="r"/>
-            <a:r>
-              <a:rPr sz="1100" b="0">
-                <a:solidFill>
-                  <a:srgbClr val="D8CFBE"/>
-                </a:solidFill>
-                <a:latin typeface="DM Sans"/>
-              </a:rPr>
-              <a:t>STAFF · Staff Attendance · 07/15</a:t>
-            </a:r>
-          </a:p>
-        </p:txBody>
-      </p:sp>
-    </p:spTree>
-  </p:cSld>
-  <p:clrMapOvr>
-    <a:masterClrMapping/>
-  </p:clrMapOvr>
-</p:sld>
-</file>
-
-<file path=ppt/slides/slide8.xml><?xml version="1.0" encoding="utf-8"?>
-<p:sld xmlns:a="http://schemas.openxmlformats.org/drawingml/2006/main" xmlns:p="http://schemas.openxmlformats.org/presentationml/2006/main" xmlns:r="http://schemas.openxmlformats.org/officeDocument/2006/relationships">
-  <p:cSld>
-    <p:bg>
-      <p:bgPr>
-        <a:solidFill>
-          <a:srgbClr val="0E1411"/>
-        </a:solidFill>
-        <a:effectLst/>
-      </p:bgPr>
-    </p:bg>
     <p:spTree>
       <p:nvGrpSpPr>
         <p:cNvPr id="1" name=""/>
@@ -5543,7 +3188,7 @@
       <p:grpSpPr/>
       <p:pic>
         <p:nvPicPr>
-          <p:cNvPr id="2" name="Picture 1" descr="kente-texture-overlay.png"/>
+          <p:cNvPr id="2" name="Picture 1" descr="slide_11.png"/>
           <p:cNvPicPr>
             <a:picLocks noChangeAspect="1"/>
           </p:cNvPicPr>
@@ -5565,111 +3210,6 @@
           </a:prstGeom>
         </p:spPr>
       </p:pic>
-      <p:sp>
-        <p:nvSpPr>
-          <p:cNvPr id="3" name="TextBox 2"/>
-          <p:cNvSpPr txBox="1"/>
-          <p:nvPr/>
-        </p:nvSpPr>
-        <p:spPr>
-          <a:xfrm>
-            <a:off x="800000" y="1500000"/>
-            <a:ext cx="10500000" cy="3500000"/>
-          </a:xfrm>
-          <a:prstGeom prst="rect">
-            <a:avLst/>
-          </a:prstGeom>
-          <a:noFill/>
-        </p:spPr>
-        <p:txBody>
-          <a:bodyPr wrap="square">
-            <a:spAutoFit/>
-          </a:bodyPr>
-          <a:lstStyle/>
-          <a:p>
-            <a:pPr algn="ctr"/>
-            <a:r>
-              <a:rPr sz="22000" b="1">
-                <a:solidFill>
-                  <a:srgbClr val="C9A14A"/>
-                </a:solidFill>
-                <a:latin typeface="Playfair Display"/>
-              </a:rPr>
-              <a:t>&lt;N04&gt;</a:t>
-            </a:r>
-          </a:p>
-        </p:txBody>
-      </p:sp>
-      <p:sp>
-        <p:nvSpPr>
-          <p:cNvPr id="4" name="TextBox 3"/>
-          <p:cNvSpPr txBox="1"/>
-          <p:nvPr/>
-        </p:nvSpPr>
-        <p:spPr>
-          <a:xfrm>
-            <a:off x="800000" y="5300000"/>
-            <a:ext cx="10500000" cy="700000"/>
-          </a:xfrm>
-          <a:prstGeom prst="rect">
-            <a:avLst/>
-          </a:prstGeom>
-          <a:noFill/>
-        </p:spPr>
-        <p:txBody>
-          <a:bodyPr wrap="square">
-            <a:spAutoFit/>
-          </a:bodyPr>
-          <a:lstStyle/>
-          <a:p>
-            <a:pPr algn="ctr"/>
-            <a:r>
-              <a:rPr sz="2800" b="0">
-                <a:solidFill>
-                  <a:srgbClr val="F6F1E7"/>
-                </a:solidFill>
-                <a:latin typeface="DM Sans"/>
-              </a:rPr>
-              <a:t>First-try success rate inside the geofence.</a:t>
-            </a:r>
-          </a:p>
-        </p:txBody>
-      </p:sp>
-      <p:sp>
-        <p:nvSpPr>
-          <p:cNvPr id="5" name="TextBox 4"/>
-          <p:cNvSpPr txBox="1"/>
-          <p:nvPr/>
-        </p:nvSpPr>
-        <p:spPr>
-          <a:xfrm>
-            <a:off x="8000000" y="6500000"/>
-            <a:ext cx="4000000" cy="300000"/>
-          </a:xfrm>
-          <a:prstGeom prst="rect">
-            <a:avLst/>
-          </a:prstGeom>
-          <a:noFill/>
-        </p:spPr>
-        <p:txBody>
-          <a:bodyPr wrap="square">
-            <a:spAutoFit/>
-          </a:bodyPr>
-          <a:lstStyle/>
-          <a:p>
-            <a:pPr algn="r"/>
-            <a:r>
-              <a:rPr sz="1100" b="0">
-                <a:solidFill>
-                  <a:srgbClr val="D8CFBE"/>
-                </a:solidFill>
-                <a:latin typeface="DM Sans"/>
-              </a:rPr>
-              <a:t>STAFF · Staff Attendance · 08/15</a:t>
-            </a:r>
-          </a:p>
-        </p:txBody>
-      </p:sp>
     </p:spTree>
   </p:cSld>
   <p:clrMapOvr>
@@ -5678,17 +3218,9 @@
 </p:sld>
 </file>
 
-<file path=ppt/slides/slide9.xml><?xml version="1.0" encoding="utf-8"?>
+<file path=ppt/slides/slide12.xml><?xml version="1.0" encoding="utf-8"?>
 <p:sld xmlns:a="http://schemas.openxmlformats.org/drawingml/2006/main" xmlns:p="http://schemas.openxmlformats.org/presentationml/2006/main" xmlns:r="http://schemas.openxmlformats.org/officeDocument/2006/relationships">
   <p:cSld>
-    <p:bg>
-      <p:bgPr>
-        <a:solidFill>
-          <a:srgbClr val="F6F1E7"/>
-        </a:solidFill>
-        <a:effectLst/>
-      </p:bgPr>
-    </p:bg>
     <p:spTree>
       <p:nvGrpSpPr>
         <p:cNvPr id="1" name=""/>
@@ -5696,44 +3228,9 @@
         <p:nvPr/>
       </p:nvGrpSpPr>
       <p:grpSpPr/>
-      <p:sp>
-        <p:nvSpPr>
-          <p:cNvPr id="2" name="TextBox 1"/>
-          <p:cNvSpPr txBox="1"/>
-          <p:nvPr/>
-        </p:nvSpPr>
-        <p:spPr>
-          <a:xfrm>
-            <a:off x="1200000" y="2200000"/>
-            <a:ext cx="9700000" cy="1500000"/>
-          </a:xfrm>
-          <a:prstGeom prst="rect">
-            <a:avLst/>
-          </a:prstGeom>
-          <a:noFill/>
-        </p:spPr>
-        <p:txBody>
-          <a:bodyPr wrap="square">
-            <a:spAutoFit/>
-          </a:bodyPr>
-          <a:lstStyle/>
-          <a:p>
-            <a:pPr algn="ctr"/>
-            <a:r>
-              <a:rPr sz="4400" b="1">
-                <a:solidFill>
-                  <a:srgbClr val="0E1411"/>
-                </a:solidFill>
-                <a:latin typeface="Playfair Display"/>
-              </a:rPr>
-              <a:t>Streaks turn habit into recognition.</a:t>
-            </a:r>
-          </a:p>
-        </p:txBody>
-      </p:sp>
       <p:pic>
         <p:nvPicPr>
-          <p:cNvPr id="3" name="Picture 2" descr="gold-deco-hairline.png"/>
+          <p:cNvPr id="2" name="Picture 1" descr="slide_12.png"/>
           <p:cNvPicPr>
             <a:picLocks noChangeAspect="1"/>
           </p:cNvPicPr>
@@ -5747,84 +3244,476 @@
         </p:blipFill>
         <p:spPr>
           <a:xfrm>
-            <a:off x="5896000" y="3800000"/>
-            <a:ext cx="400000" cy="20000"/>
+            <a:off x="0" y="0"/>
+            <a:ext cx="12192000" cy="6858000"/>
           </a:xfrm>
           <a:prstGeom prst="rect">
             <a:avLst/>
           </a:prstGeom>
         </p:spPr>
       </p:pic>
-      <p:sp>
-        <p:nvSpPr>
-          <p:cNvPr id="4" name="TextBox 3"/>
-          <p:cNvSpPr txBox="1"/>
+    </p:spTree>
+  </p:cSld>
+  <p:clrMapOvr>
+    <a:masterClrMapping/>
+  </p:clrMapOvr>
+</p:sld>
+</file>
+
+<file path=ppt/slides/slide13.xml><?xml version="1.0" encoding="utf-8"?>
+<p:sld xmlns:a="http://schemas.openxmlformats.org/drawingml/2006/main" xmlns:p="http://schemas.openxmlformats.org/presentationml/2006/main" xmlns:r="http://schemas.openxmlformats.org/officeDocument/2006/relationships">
+  <p:cSld>
+    <p:spTree>
+      <p:nvGrpSpPr>
+        <p:cNvPr id="1" name=""/>
+        <p:cNvGrpSpPr/>
+        <p:nvPr/>
+      </p:nvGrpSpPr>
+      <p:grpSpPr/>
+      <p:pic>
+        <p:nvPicPr>
+          <p:cNvPr id="2" name="Picture 1" descr="slide_13.png"/>
+          <p:cNvPicPr>
+            <a:picLocks noChangeAspect="1"/>
+          </p:cNvPicPr>
           <p:nvPr/>
-        </p:nvSpPr>
+        </p:nvPicPr>
+        <p:blipFill>
+          <a:blip r:embed="rId2"/>
+          <a:stretch>
+            <a:fillRect/>
+          </a:stretch>
+        </p:blipFill>
         <p:spPr>
           <a:xfrm>
-            <a:off x="1500000" y="4100000"/>
-            <a:ext cx="9100000" cy="1200000"/>
+            <a:off x="0" y="0"/>
+            <a:ext cx="12192000" cy="6858000"/>
           </a:xfrm>
           <a:prstGeom prst="rect">
             <a:avLst/>
           </a:prstGeom>
-          <a:noFill/>
         </p:spPr>
-        <p:txBody>
-          <a:bodyPr wrap="square">
-            <a:spAutoFit/>
-          </a:bodyPr>
-          <a:lstStyle/>
-          <a:p>
-            <a:pPr algn="ctr"/>
-            <a:r>
-              <a:rPr sz="2200" b="0">
-                <a:solidFill>
-                  <a:srgbClr val="1A1714"/>
-                </a:solidFill>
-                <a:latin typeface="DM Sans"/>
-              </a:rPr>
-              <a:t>Consecutive working-day counter. "Best-ever" stays remembered.</a:t>
-            </a:r>
-          </a:p>
-        </p:txBody>
-      </p:sp>
-      <p:sp>
-        <p:nvSpPr>
-          <p:cNvPr id="5" name="TextBox 4"/>
-          <p:cNvSpPr txBox="1"/>
+      </p:pic>
+    </p:spTree>
+  </p:cSld>
+  <p:clrMapOvr>
+    <a:masterClrMapping/>
+  </p:clrMapOvr>
+</p:sld>
+</file>
+
+<file path=ppt/slides/slide14.xml><?xml version="1.0" encoding="utf-8"?>
+<p:sld xmlns:a="http://schemas.openxmlformats.org/drawingml/2006/main" xmlns:p="http://schemas.openxmlformats.org/presentationml/2006/main" xmlns:r="http://schemas.openxmlformats.org/officeDocument/2006/relationships">
+  <p:cSld>
+    <p:spTree>
+      <p:nvGrpSpPr>
+        <p:cNvPr id="1" name=""/>
+        <p:cNvGrpSpPr/>
+        <p:nvPr/>
+      </p:nvGrpSpPr>
+      <p:grpSpPr/>
+      <p:pic>
+        <p:nvPicPr>
+          <p:cNvPr id="2" name="Picture 1" descr="slide_14.png"/>
+          <p:cNvPicPr>
+            <a:picLocks noChangeAspect="1"/>
+          </p:cNvPicPr>
           <p:nvPr/>
-        </p:nvSpPr>
+        </p:nvPicPr>
+        <p:blipFill>
+          <a:blip r:embed="rId2"/>
+          <a:stretch>
+            <a:fillRect/>
+          </a:stretch>
+        </p:blipFill>
         <p:spPr>
           <a:xfrm>
-            <a:off x="8000000" y="6500000"/>
-            <a:ext cx="4000000" cy="300000"/>
+            <a:off x="0" y="0"/>
+            <a:ext cx="12192000" cy="6858000"/>
           </a:xfrm>
           <a:prstGeom prst="rect">
             <a:avLst/>
           </a:prstGeom>
-          <a:noFill/>
         </p:spPr>
-        <p:txBody>
-          <a:bodyPr wrap="square">
-            <a:spAutoFit/>
-          </a:bodyPr>
-          <a:lstStyle/>
-          <a:p>
-            <a:pPr algn="r"/>
-            <a:r>
-              <a:rPr sz="1100" b="0">
-                <a:solidFill>
-                  <a:srgbClr val="D8CFBE"/>
-                </a:solidFill>
-                <a:latin typeface="DM Sans"/>
-              </a:rPr>
-              <a:t>STAFF · Staff Attendance · 09/15</a:t>
-            </a:r>
-          </a:p>
-        </p:txBody>
-      </p:sp>
+      </p:pic>
+    </p:spTree>
+  </p:cSld>
+  <p:clrMapOvr>
+    <a:masterClrMapping/>
+  </p:clrMapOvr>
+</p:sld>
+</file>
+
+<file path=ppt/slides/slide15.xml><?xml version="1.0" encoding="utf-8"?>
+<p:sld xmlns:a="http://schemas.openxmlformats.org/drawingml/2006/main" xmlns:p="http://schemas.openxmlformats.org/presentationml/2006/main" xmlns:r="http://schemas.openxmlformats.org/officeDocument/2006/relationships">
+  <p:cSld>
+    <p:spTree>
+      <p:nvGrpSpPr>
+        <p:cNvPr id="1" name=""/>
+        <p:cNvGrpSpPr/>
+        <p:nvPr/>
+      </p:nvGrpSpPr>
+      <p:grpSpPr/>
+      <p:pic>
+        <p:nvPicPr>
+          <p:cNvPr id="2" name="Picture 1" descr="slide_15.png"/>
+          <p:cNvPicPr>
+            <a:picLocks noChangeAspect="1"/>
+          </p:cNvPicPr>
+          <p:nvPr/>
+        </p:nvPicPr>
+        <p:blipFill>
+          <a:blip r:embed="rId2"/>
+          <a:stretch>
+            <a:fillRect/>
+          </a:stretch>
+        </p:blipFill>
+        <p:spPr>
+          <a:xfrm>
+            <a:off x="0" y="0"/>
+            <a:ext cx="12192000" cy="6858000"/>
+          </a:xfrm>
+          <a:prstGeom prst="rect">
+            <a:avLst/>
+          </a:prstGeom>
+        </p:spPr>
+      </p:pic>
+    </p:spTree>
+  </p:cSld>
+  <p:clrMapOvr>
+    <a:masterClrMapping/>
+  </p:clrMapOvr>
+</p:sld>
+</file>
+
+<file path=ppt/slides/slide2.xml><?xml version="1.0" encoding="utf-8"?>
+<p:sld xmlns:a="http://schemas.openxmlformats.org/drawingml/2006/main" xmlns:p="http://schemas.openxmlformats.org/presentationml/2006/main" xmlns:r="http://schemas.openxmlformats.org/officeDocument/2006/relationships">
+  <p:cSld>
+    <p:spTree>
+      <p:nvGrpSpPr>
+        <p:cNvPr id="1" name=""/>
+        <p:cNvGrpSpPr/>
+        <p:nvPr/>
+      </p:nvGrpSpPr>
+      <p:grpSpPr/>
+      <p:pic>
+        <p:nvPicPr>
+          <p:cNvPr id="2" name="Picture 1" descr="slide_02.png"/>
+          <p:cNvPicPr>
+            <a:picLocks noChangeAspect="1"/>
+          </p:cNvPicPr>
+          <p:nvPr/>
+        </p:nvPicPr>
+        <p:blipFill>
+          <a:blip r:embed="rId2"/>
+          <a:stretch>
+            <a:fillRect/>
+          </a:stretch>
+        </p:blipFill>
+        <p:spPr>
+          <a:xfrm>
+            <a:off x="0" y="0"/>
+            <a:ext cx="12192000" cy="6858000"/>
+          </a:xfrm>
+          <a:prstGeom prst="rect">
+            <a:avLst/>
+          </a:prstGeom>
+        </p:spPr>
+      </p:pic>
+    </p:spTree>
+  </p:cSld>
+  <p:clrMapOvr>
+    <a:masterClrMapping/>
+  </p:clrMapOvr>
+</p:sld>
+</file>
+
+<file path=ppt/slides/slide3.xml><?xml version="1.0" encoding="utf-8"?>
+<p:sld xmlns:a="http://schemas.openxmlformats.org/drawingml/2006/main" xmlns:p="http://schemas.openxmlformats.org/presentationml/2006/main" xmlns:r="http://schemas.openxmlformats.org/officeDocument/2006/relationships">
+  <p:cSld>
+    <p:spTree>
+      <p:nvGrpSpPr>
+        <p:cNvPr id="1" name=""/>
+        <p:cNvGrpSpPr/>
+        <p:nvPr/>
+      </p:nvGrpSpPr>
+      <p:grpSpPr/>
+      <p:pic>
+        <p:nvPicPr>
+          <p:cNvPr id="2" name="Picture 1" descr="slide_03.png"/>
+          <p:cNvPicPr>
+            <a:picLocks noChangeAspect="1"/>
+          </p:cNvPicPr>
+          <p:nvPr/>
+        </p:nvPicPr>
+        <p:blipFill>
+          <a:blip r:embed="rId2"/>
+          <a:stretch>
+            <a:fillRect/>
+          </a:stretch>
+        </p:blipFill>
+        <p:spPr>
+          <a:xfrm>
+            <a:off x="0" y="0"/>
+            <a:ext cx="12192000" cy="6858000"/>
+          </a:xfrm>
+          <a:prstGeom prst="rect">
+            <a:avLst/>
+          </a:prstGeom>
+        </p:spPr>
+      </p:pic>
+    </p:spTree>
+  </p:cSld>
+  <p:clrMapOvr>
+    <a:masterClrMapping/>
+  </p:clrMapOvr>
+</p:sld>
+</file>
+
+<file path=ppt/slides/slide4.xml><?xml version="1.0" encoding="utf-8"?>
+<p:sld xmlns:a="http://schemas.openxmlformats.org/drawingml/2006/main" xmlns:p="http://schemas.openxmlformats.org/presentationml/2006/main" xmlns:r="http://schemas.openxmlformats.org/officeDocument/2006/relationships">
+  <p:cSld>
+    <p:spTree>
+      <p:nvGrpSpPr>
+        <p:cNvPr id="1" name=""/>
+        <p:cNvGrpSpPr/>
+        <p:nvPr/>
+      </p:nvGrpSpPr>
+      <p:grpSpPr/>
+      <p:pic>
+        <p:nvPicPr>
+          <p:cNvPr id="2" name="Picture 1" descr="slide_04.png"/>
+          <p:cNvPicPr>
+            <a:picLocks noChangeAspect="1"/>
+          </p:cNvPicPr>
+          <p:nvPr/>
+        </p:nvPicPr>
+        <p:blipFill>
+          <a:blip r:embed="rId2"/>
+          <a:stretch>
+            <a:fillRect/>
+          </a:stretch>
+        </p:blipFill>
+        <p:spPr>
+          <a:xfrm>
+            <a:off x="0" y="0"/>
+            <a:ext cx="12192000" cy="6858000"/>
+          </a:xfrm>
+          <a:prstGeom prst="rect">
+            <a:avLst/>
+          </a:prstGeom>
+        </p:spPr>
+      </p:pic>
+    </p:spTree>
+  </p:cSld>
+  <p:clrMapOvr>
+    <a:masterClrMapping/>
+  </p:clrMapOvr>
+</p:sld>
+</file>
+
+<file path=ppt/slides/slide5.xml><?xml version="1.0" encoding="utf-8"?>
+<p:sld xmlns:a="http://schemas.openxmlformats.org/drawingml/2006/main" xmlns:p="http://schemas.openxmlformats.org/presentationml/2006/main" xmlns:r="http://schemas.openxmlformats.org/officeDocument/2006/relationships">
+  <p:cSld>
+    <p:spTree>
+      <p:nvGrpSpPr>
+        <p:cNvPr id="1" name=""/>
+        <p:cNvGrpSpPr/>
+        <p:nvPr/>
+      </p:nvGrpSpPr>
+      <p:grpSpPr/>
+      <p:pic>
+        <p:nvPicPr>
+          <p:cNvPr id="2" name="Picture 1" descr="slide_05.png"/>
+          <p:cNvPicPr>
+            <a:picLocks noChangeAspect="1"/>
+          </p:cNvPicPr>
+          <p:nvPr/>
+        </p:nvPicPr>
+        <p:blipFill>
+          <a:blip r:embed="rId2"/>
+          <a:stretch>
+            <a:fillRect/>
+          </a:stretch>
+        </p:blipFill>
+        <p:spPr>
+          <a:xfrm>
+            <a:off x="0" y="0"/>
+            <a:ext cx="12192000" cy="6858000"/>
+          </a:xfrm>
+          <a:prstGeom prst="rect">
+            <a:avLst/>
+          </a:prstGeom>
+        </p:spPr>
+      </p:pic>
+    </p:spTree>
+  </p:cSld>
+  <p:clrMapOvr>
+    <a:masterClrMapping/>
+  </p:clrMapOvr>
+</p:sld>
+</file>
+
+<file path=ppt/slides/slide6.xml><?xml version="1.0" encoding="utf-8"?>
+<p:sld xmlns:a="http://schemas.openxmlformats.org/drawingml/2006/main" xmlns:p="http://schemas.openxmlformats.org/presentationml/2006/main" xmlns:r="http://schemas.openxmlformats.org/officeDocument/2006/relationships">
+  <p:cSld>
+    <p:spTree>
+      <p:nvGrpSpPr>
+        <p:cNvPr id="1" name=""/>
+        <p:cNvGrpSpPr/>
+        <p:nvPr/>
+      </p:nvGrpSpPr>
+      <p:grpSpPr/>
+      <p:pic>
+        <p:nvPicPr>
+          <p:cNvPr id="2" name="Picture 1" descr="slide_06.png"/>
+          <p:cNvPicPr>
+            <a:picLocks noChangeAspect="1"/>
+          </p:cNvPicPr>
+          <p:nvPr/>
+        </p:nvPicPr>
+        <p:blipFill>
+          <a:blip r:embed="rId2"/>
+          <a:stretch>
+            <a:fillRect/>
+          </a:stretch>
+        </p:blipFill>
+        <p:spPr>
+          <a:xfrm>
+            <a:off x="0" y="0"/>
+            <a:ext cx="12192000" cy="6858000"/>
+          </a:xfrm>
+          <a:prstGeom prst="rect">
+            <a:avLst/>
+          </a:prstGeom>
+        </p:spPr>
+      </p:pic>
+    </p:spTree>
+  </p:cSld>
+  <p:clrMapOvr>
+    <a:masterClrMapping/>
+  </p:clrMapOvr>
+</p:sld>
+</file>
+
+<file path=ppt/slides/slide7.xml><?xml version="1.0" encoding="utf-8"?>
+<p:sld xmlns:a="http://schemas.openxmlformats.org/drawingml/2006/main" xmlns:p="http://schemas.openxmlformats.org/presentationml/2006/main" xmlns:r="http://schemas.openxmlformats.org/officeDocument/2006/relationships">
+  <p:cSld>
+    <p:spTree>
+      <p:nvGrpSpPr>
+        <p:cNvPr id="1" name=""/>
+        <p:cNvGrpSpPr/>
+        <p:nvPr/>
+      </p:nvGrpSpPr>
+      <p:grpSpPr/>
+      <p:pic>
+        <p:nvPicPr>
+          <p:cNvPr id="2" name="Picture 1" descr="slide_07.png"/>
+          <p:cNvPicPr>
+            <a:picLocks noChangeAspect="1"/>
+          </p:cNvPicPr>
+          <p:nvPr/>
+        </p:nvPicPr>
+        <p:blipFill>
+          <a:blip r:embed="rId2"/>
+          <a:stretch>
+            <a:fillRect/>
+          </a:stretch>
+        </p:blipFill>
+        <p:spPr>
+          <a:xfrm>
+            <a:off x="0" y="0"/>
+            <a:ext cx="12192000" cy="6858000"/>
+          </a:xfrm>
+          <a:prstGeom prst="rect">
+            <a:avLst/>
+          </a:prstGeom>
+        </p:spPr>
+      </p:pic>
+    </p:spTree>
+  </p:cSld>
+  <p:clrMapOvr>
+    <a:masterClrMapping/>
+  </p:clrMapOvr>
+</p:sld>
+</file>
+
+<file path=ppt/slides/slide8.xml><?xml version="1.0" encoding="utf-8"?>
+<p:sld xmlns:a="http://schemas.openxmlformats.org/drawingml/2006/main" xmlns:p="http://schemas.openxmlformats.org/presentationml/2006/main" xmlns:r="http://schemas.openxmlformats.org/officeDocument/2006/relationships">
+  <p:cSld>
+    <p:spTree>
+      <p:nvGrpSpPr>
+        <p:cNvPr id="1" name=""/>
+        <p:cNvGrpSpPr/>
+        <p:nvPr/>
+      </p:nvGrpSpPr>
+      <p:grpSpPr/>
+      <p:pic>
+        <p:nvPicPr>
+          <p:cNvPr id="2" name="Picture 1" descr="slide_08.png"/>
+          <p:cNvPicPr>
+            <a:picLocks noChangeAspect="1"/>
+          </p:cNvPicPr>
+          <p:nvPr/>
+        </p:nvPicPr>
+        <p:blipFill>
+          <a:blip r:embed="rId2"/>
+          <a:stretch>
+            <a:fillRect/>
+          </a:stretch>
+        </p:blipFill>
+        <p:spPr>
+          <a:xfrm>
+            <a:off x="0" y="0"/>
+            <a:ext cx="12192000" cy="6858000"/>
+          </a:xfrm>
+          <a:prstGeom prst="rect">
+            <a:avLst/>
+          </a:prstGeom>
+        </p:spPr>
+      </p:pic>
+    </p:spTree>
+  </p:cSld>
+  <p:clrMapOvr>
+    <a:masterClrMapping/>
+  </p:clrMapOvr>
+</p:sld>
+</file>
+
+<file path=ppt/slides/slide9.xml><?xml version="1.0" encoding="utf-8"?>
+<p:sld xmlns:a="http://schemas.openxmlformats.org/drawingml/2006/main" xmlns:p="http://schemas.openxmlformats.org/presentationml/2006/main" xmlns:r="http://schemas.openxmlformats.org/officeDocument/2006/relationships">
+  <p:cSld>
+    <p:spTree>
+      <p:nvGrpSpPr>
+        <p:cNvPr id="1" name=""/>
+        <p:cNvGrpSpPr/>
+        <p:nvPr/>
+      </p:nvGrpSpPr>
+      <p:grpSpPr/>
+      <p:pic>
+        <p:nvPicPr>
+          <p:cNvPr id="2" name="Picture 1" descr="slide_09.png"/>
+          <p:cNvPicPr>
+            <a:picLocks noChangeAspect="1"/>
+          </p:cNvPicPr>
+          <p:nvPr/>
+        </p:nvPicPr>
+        <p:blipFill>
+          <a:blip r:embed="rId2"/>
+          <a:stretch>
+            <a:fillRect/>
+          </a:stretch>
+        </p:blipFill>
+        <p:spPr>
+          <a:xfrm>
+            <a:off x="0" y="0"/>
+            <a:ext cx="12192000" cy="6858000"/>
+          </a:xfrm>
+          <a:prstGeom prst="rect">
+            <a:avLst/>
+          </a:prstGeom>
+        </p:spPr>
+      </p:pic>
     </p:spTree>
   </p:cSld>
   <p:clrMapOvr>
